--- a/武汉FC仓海柔自动化系统方案.pptx
+++ b/武汉FC仓海柔自动化系统方案.pptx
@@ -883,8 +883,8 @@
         </p:nvSpPr>
         <p:spPr>
           <a:xfrm>
-            <a:off x="310896" y="274320"/>
-            <a:ext cx="82296" cy="365760"/>
+            <a:off x="310896" y="219456"/>
+            <a:ext cx="82296" cy="347472"/>
           </a:xfrm>
           <a:prstGeom prst="rect">
             <a:avLst/>
@@ -903,8 +903,8 @@
         </p:nvSpPr>
         <p:spPr>
           <a:xfrm>
-            <a:off x="475488" y="237744"/>
-            <a:ext cx="10515600" cy="420624"/>
+            <a:off x="475488" y="182880"/>
+            <a:ext cx="10607040" cy="402336"/>
           </a:xfrm>
           <a:prstGeom prst="rect">
             <a:avLst/>
@@ -920,7 +920,7 @@
               <a:buNone/>
             </a:pPr>
             <a:r>
-              <a:rPr lang="en-US" sz="2200" b="1" dirty="0">
+              <a:rPr lang="en-US" sz="2100" b="1" dirty="0">
                 <a:solidFill>
                   <a:srgbClr val="262626"/>
                 </a:solidFill>
@@ -928,9 +928,9 @@
                 <a:ea typeface="Microsoft YaHei" pitchFamily="34" charset="-122"/>
                 <a:cs typeface="Microsoft YaHei" pitchFamily="34" charset="-120"/>
               </a:rPr>
-              <a:t>武汉 FC 仓 · 海柔自动化系统方案</a:t>
-            </a:r>
-            <a:endParaRPr lang="en-US" sz="2200" dirty="0"/>
+              <a:t>武汉 FC 仓 · 海柔自动化系统落地方案</a:t>
+            </a:r>
+            <a:endParaRPr lang="en-US" sz="2100" dirty="0"/>
           </a:p>
         </p:txBody>
       </p:sp>
@@ -942,8 +942,8 @@
         </p:nvSpPr>
         <p:spPr>
           <a:xfrm>
-            <a:off x="475488" y="676656"/>
-            <a:ext cx="11338560" cy="201168"/>
+            <a:off x="475488" y="576072"/>
+            <a:ext cx="11338560" cy="182880"/>
           </a:xfrm>
           <a:prstGeom prst="rect">
             <a:avLst/>
@@ -959,7 +959,7 @@
               <a:buNone/>
             </a:pPr>
             <a:r>
-              <a:rPr lang="en-US" sz="950" dirty="0">
+              <a:rPr lang="en-US" sz="900" dirty="0">
                 <a:solidFill>
                   <a:srgbClr val="8A929B"/>
                 </a:solidFill>
@@ -967,9 +967,9 @@
                 <a:ea typeface="Microsoft YaHei" pitchFamily="34" charset="-122"/>
                 <a:cs typeface="Microsoft YaHei" pitchFamily="34" charset="-120"/>
               </a:rPr>
-              <a:t>FC WMS → 自研 WCS → 海柔闪攀（料箱到人）　·　全渠道仓库自动化总体框架在武汉 FC 仓的一次落地</a:t>
-            </a:r>
-            <a:endParaRPr lang="en-US" sz="950" dirty="0"/>
+              <a:t>业务 FC WMS  →  自研 WCS 统一调度（重点）  →  海柔 HAIQ 料箱到人系统执行　·　总体框架在武汉 FC 仓的一次落地</a:t>
+            </a:r>
+            <a:endParaRPr lang="en-US" sz="900" dirty="0"/>
           </a:p>
         </p:txBody>
       </p:sp>
@@ -981,7 +981,7 @@
         </p:nvSpPr>
         <p:spPr>
           <a:xfrm>
-            <a:off x="310896" y="923544"/>
+            <a:off x="310896" y="850392"/>
             <a:ext cx="118872" cy="118872"/>
           </a:xfrm>
           <a:prstGeom prst="roundRect">
@@ -1003,8 +1003,8 @@
         </p:nvSpPr>
         <p:spPr>
           <a:xfrm>
-            <a:off x="512064" y="896112"/>
-            <a:ext cx="8229600" cy="164592"/>
+            <a:off x="512064" y="822960"/>
+            <a:ext cx="8686800" cy="164592"/>
           </a:xfrm>
           <a:prstGeom prst="rect">
             <a:avLst/>
@@ -1028,7 +1028,7 @@
                 <a:ea typeface="Microsoft YaHei" pitchFamily="34" charset="-122"/>
                 <a:cs typeface="Microsoft YaHei" pitchFamily="34" charset="-120"/>
               </a:rPr>
-              <a:t>上游业务系统 · FC WMS</a:t>
+              <a:t>① 业务系统层 · FC WMS</a:t>
             </a:r>
             <a:endParaRPr lang="en-US" sz="950" dirty="0"/>
           </a:p>
@@ -1042,7 +1042,7 @@
         </p:nvSpPr>
         <p:spPr>
           <a:xfrm>
-            <a:off x="8622792" y="896112"/>
+            <a:off x="8622792" y="822960"/>
             <a:ext cx="3108960" cy="164592"/>
           </a:xfrm>
           <a:prstGeom prst="rect">
@@ -1081,12 +1081,12 @@
         </p:nvSpPr>
         <p:spPr>
           <a:xfrm>
-            <a:off x="310896" y="1060704"/>
-            <a:ext cx="3733800" cy="420624"/>
+            <a:off x="310896" y="969264"/>
+            <a:ext cx="3733800" cy="365760"/>
           </a:xfrm>
           <a:prstGeom prst="roundRect">
             <a:avLst>
-              <a:gd name="adj" fmla="val 8696"/>
+              <a:gd name="adj" fmla="val 10000"/>
             </a:avLst>
           </a:prstGeom>
           <a:solidFill>
@@ -1108,24 +1108,24 @@
         </p:nvSpPr>
         <p:spPr>
           <a:xfrm>
-            <a:off x="310896" y="1097280"/>
-            <a:ext cx="3733800" cy="182880"/>
-          </a:xfrm>
-          <a:prstGeom prst="rect">
-            <a:avLst/>
-          </a:prstGeom>
-          <a:noFill/>
-          <a:ln/>
-        </p:spPr>
-        <p:txBody>
-          <a:bodyPr wrap="square" lIns="0" tIns="0" rIns="0" bIns="0" rtlCol="0" anchor="ctr"/>
-          <a:lstStyle/>
-          <a:p>
-            <a:pPr algn="ctr" indent="0" marL="0">
-              <a:buNone/>
-            </a:pPr>
-            <a:r>
-              <a:rPr lang="en-US" sz="1100" b="1" dirty="0">
+            <a:off x="310896" y="996696"/>
+            <a:ext cx="3733800" cy="173736"/>
+          </a:xfrm>
+          <a:prstGeom prst="rect">
+            <a:avLst/>
+          </a:prstGeom>
+          <a:noFill/>
+          <a:ln/>
+        </p:spPr>
+        <p:txBody>
+          <a:bodyPr wrap="square" lIns="0" tIns="0" rIns="0" bIns="0" rtlCol="0" anchor="ctr"/>
+          <a:lstStyle/>
+          <a:p>
+            <a:pPr algn="ctr" indent="0" marL="0">
+              <a:buNone/>
+            </a:pPr>
+            <a:r>
+              <a:rPr lang="en-US" sz="1050" b="1" dirty="0">
                 <a:solidFill>
                   <a:srgbClr val="1F4E79"/>
                 </a:solidFill>
@@ -1135,7 +1135,7 @@
               </a:rPr>
               <a:t>FC Flux WMS</a:t>
             </a:r>
-            <a:endParaRPr lang="en-US" sz="1100" dirty="0"/>
+            <a:endParaRPr lang="en-US" sz="1050" dirty="0"/>
           </a:p>
         </p:txBody>
       </p:sp>
@@ -1147,24 +1147,24 @@
         </p:nvSpPr>
         <p:spPr>
           <a:xfrm>
-            <a:off x="310896" y="1280160"/>
-            <a:ext cx="3733800" cy="155448"/>
-          </a:xfrm>
-          <a:prstGeom prst="rect">
-            <a:avLst/>
-          </a:prstGeom>
-          <a:noFill/>
-          <a:ln/>
-        </p:spPr>
-        <p:txBody>
-          <a:bodyPr wrap="square" lIns="0" tIns="0" rIns="0" bIns="0" rtlCol="0" anchor="ctr"/>
-          <a:lstStyle/>
-          <a:p>
-            <a:pPr algn="ctr" indent="0" marL="0">
-              <a:buNone/>
-            </a:pPr>
-            <a:r>
-              <a:rPr lang="en-US" sz="800" dirty="0">
+            <a:off x="310896" y="1161288"/>
+            <a:ext cx="3733800" cy="146304"/>
+          </a:xfrm>
+          <a:prstGeom prst="rect">
+            <a:avLst/>
+          </a:prstGeom>
+          <a:noFill/>
+          <a:ln/>
+        </p:spPr>
+        <p:txBody>
+          <a:bodyPr wrap="square" lIns="0" tIns="0" rIns="0" bIns="0" rtlCol="0" anchor="ctr"/>
+          <a:lstStyle/>
+          <a:p>
+            <a:pPr algn="ctr" indent="0" marL="0">
+              <a:buNone/>
+            </a:pPr>
+            <a:r>
+              <a:rPr lang="en-US" sz="780" dirty="0">
                 <a:solidFill>
                   <a:srgbClr val="98A2AC"/>
                 </a:solidFill>
@@ -1174,7 +1174,7 @@
               </a:rPr>
               <a:t>沃尔玛 FC 仓库管理系统</a:t>
             </a:r>
-            <a:endParaRPr lang="en-US" sz="800" dirty="0"/>
+            <a:endParaRPr lang="en-US" sz="780" dirty="0"/>
           </a:p>
         </p:txBody>
       </p:sp>
@@ -1186,12 +1186,12 @@
         </p:nvSpPr>
         <p:spPr>
           <a:xfrm>
-            <a:off x="4227576" y="1060704"/>
-            <a:ext cx="3733800" cy="420624"/>
+            <a:off x="4227576" y="969264"/>
+            <a:ext cx="3733800" cy="365760"/>
           </a:xfrm>
           <a:prstGeom prst="roundRect">
             <a:avLst>
-              <a:gd name="adj" fmla="val 8696"/>
+              <a:gd name="adj" fmla="val 10000"/>
             </a:avLst>
           </a:prstGeom>
           <a:solidFill>
@@ -1213,24 +1213,24 @@
         </p:nvSpPr>
         <p:spPr>
           <a:xfrm>
-            <a:off x="4227576" y="1097280"/>
-            <a:ext cx="3733800" cy="182880"/>
-          </a:xfrm>
-          <a:prstGeom prst="rect">
-            <a:avLst/>
-          </a:prstGeom>
-          <a:noFill/>
-          <a:ln/>
-        </p:spPr>
-        <p:txBody>
-          <a:bodyPr wrap="square" lIns="0" tIns="0" rIns="0" bIns="0" rtlCol="0" anchor="ctr"/>
-          <a:lstStyle/>
-          <a:p>
-            <a:pPr algn="ctr" indent="0" marL="0">
-              <a:buNone/>
-            </a:pPr>
-            <a:r>
-              <a:rPr lang="en-US" sz="1100" b="1" dirty="0">
+            <a:off x="4227576" y="996696"/>
+            <a:ext cx="3733800" cy="173736"/>
+          </a:xfrm>
+          <a:prstGeom prst="rect">
+            <a:avLst/>
+          </a:prstGeom>
+          <a:noFill/>
+          <a:ln/>
+        </p:spPr>
+        <p:txBody>
+          <a:bodyPr wrap="square" lIns="0" tIns="0" rIns="0" bIns="0" rtlCol="0" anchor="ctr"/>
+          <a:lstStyle/>
+          <a:p>
+            <a:pPr algn="ctr" indent="0" marL="0">
+              <a:buNone/>
+            </a:pPr>
+            <a:r>
+              <a:rPr lang="en-US" sz="1050" b="1" dirty="0">
                 <a:solidFill>
                   <a:srgbClr val="1F4E79"/>
                 </a:solidFill>
@@ -1240,7 +1240,7 @@
               </a:rPr>
               <a:t>WHC · 自动化任务编排</a:t>
             </a:r>
-            <a:endParaRPr lang="en-US" sz="1100" dirty="0"/>
+            <a:endParaRPr lang="en-US" sz="1050" dirty="0"/>
           </a:p>
         </p:txBody>
       </p:sp>
@@ -1252,24 +1252,24 @@
         </p:nvSpPr>
         <p:spPr>
           <a:xfrm>
-            <a:off x="4227576" y="1280160"/>
-            <a:ext cx="3733800" cy="155448"/>
-          </a:xfrm>
-          <a:prstGeom prst="rect">
-            <a:avLst/>
-          </a:prstGeom>
-          <a:noFill/>
-          <a:ln/>
-        </p:spPr>
-        <p:txBody>
-          <a:bodyPr wrap="square" lIns="0" tIns="0" rIns="0" bIns="0" rtlCol="0" anchor="ctr"/>
-          <a:lstStyle/>
-          <a:p>
-            <a:pPr algn="ctr" indent="0" marL="0">
-              <a:buNone/>
-            </a:pPr>
-            <a:r>
-              <a:rPr lang="en-US" sz="800" dirty="0">
+            <a:off x="4227576" y="1161288"/>
+            <a:ext cx="3733800" cy="146304"/>
+          </a:xfrm>
+          <a:prstGeom prst="rect">
+            <a:avLst/>
+          </a:prstGeom>
+          <a:noFill/>
+          <a:ln/>
+        </p:spPr>
+        <p:txBody>
+          <a:bodyPr wrap="square" lIns="0" tIns="0" rIns="0" bIns="0" rtlCol="0" anchor="ctr"/>
+          <a:lstStyle/>
+          <a:p>
+            <a:pPr algn="ctr" indent="0" marL="0">
+              <a:buNone/>
+            </a:pPr>
+            <a:r>
+              <a:rPr lang="en-US" sz="780" dirty="0">
                 <a:solidFill>
                   <a:srgbClr val="98A2AC"/>
                 </a:solidFill>
@@ -1277,9 +1277,9 @@
                 <a:ea typeface="Microsoft YaHei" pitchFamily="34" charset="-122"/>
                 <a:cs typeface="Microsoft YaHei" pitchFamily="34" charset="-120"/>
               </a:rPr>
-              <a:t>上游任务统一编排 · 下发 / 回传</a:t>
-            </a:r>
-            <a:endParaRPr lang="en-US" sz="800" dirty="0"/>
+              <a:t>任务下发 / 状态回传</a:t>
+            </a:r>
+            <a:endParaRPr lang="en-US" sz="780" dirty="0"/>
           </a:p>
         </p:txBody>
       </p:sp>
@@ -1291,12 +1291,12 @@
         </p:nvSpPr>
         <p:spPr>
           <a:xfrm>
-            <a:off x="8144256" y="1060704"/>
-            <a:ext cx="3733800" cy="420624"/>
+            <a:off x="8144256" y="969264"/>
+            <a:ext cx="3733800" cy="365760"/>
           </a:xfrm>
           <a:prstGeom prst="roundRect">
             <a:avLst>
-              <a:gd name="adj" fmla="val 8696"/>
+              <a:gd name="adj" fmla="val 10000"/>
             </a:avLst>
           </a:prstGeom>
           <a:solidFill>
@@ -1318,24 +1318,24 @@
         </p:nvSpPr>
         <p:spPr>
           <a:xfrm>
-            <a:off x="8144256" y="1097280"/>
-            <a:ext cx="3733800" cy="182880"/>
-          </a:xfrm>
-          <a:prstGeom prst="rect">
-            <a:avLst/>
-          </a:prstGeom>
-          <a:noFill/>
-          <a:ln/>
-        </p:spPr>
-        <p:txBody>
-          <a:bodyPr wrap="square" lIns="0" tIns="0" rIns="0" bIns="0" rtlCol="0" anchor="ctr"/>
-          <a:lstStyle/>
-          <a:p>
-            <a:pPr algn="ctr" indent="0" marL="0">
-              <a:buNone/>
-            </a:pPr>
-            <a:r>
-              <a:rPr lang="en-US" sz="1100" b="1" dirty="0">
+            <a:off x="8144256" y="996696"/>
+            <a:ext cx="3733800" cy="173736"/>
+          </a:xfrm>
+          <a:prstGeom prst="rect">
+            <a:avLst/>
+          </a:prstGeom>
+          <a:noFill/>
+          <a:ln/>
+        </p:spPr>
+        <p:txBody>
+          <a:bodyPr wrap="square" lIns="0" tIns="0" rIns="0" bIns="0" rtlCol="0" anchor="ctr"/>
+          <a:lstStyle/>
+          <a:p>
+            <a:pPr algn="ctr" indent="0" marL="0">
+              <a:buNone/>
+            </a:pPr>
+            <a:r>
+              <a:rPr lang="en-US" sz="1050" b="1" dirty="0">
                 <a:solidFill>
                   <a:srgbClr val="1F4E79"/>
                 </a:solidFill>
@@ -1343,9 +1343,9 @@
                 <a:ea typeface="Microsoft YaHei" pitchFamily="34" charset="-122"/>
                 <a:cs typeface="Microsoft YaHei" pitchFamily="34" charset="-120"/>
               </a:rPr>
-              <a:t>对接接口</a:t>
-            </a:r>
-            <a:endParaRPr lang="en-US" sz="1100" dirty="0"/>
+              <a:t>业务数据</a:t>
+            </a:r>
+            <a:endParaRPr lang="en-US" sz="1050" dirty="0"/>
           </a:p>
         </p:txBody>
       </p:sp>
@@ -1357,24 +1357,24 @@
         </p:nvSpPr>
         <p:spPr>
           <a:xfrm>
-            <a:off x="8144256" y="1280160"/>
-            <a:ext cx="3733800" cy="155448"/>
-          </a:xfrm>
-          <a:prstGeom prst="rect">
-            <a:avLst/>
-          </a:prstGeom>
-          <a:noFill/>
-          <a:ln/>
-        </p:spPr>
-        <p:txBody>
-          <a:bodyPr wrap="square" lIns="0" tIns="0" rIns="0" bIns="0" rtlCol="0" anchor="ctr"/>
-          <a:lstStyle/>
-          <a:p>
-            <a:pPr algn="ctr" indent="0" marL="0">
-              <a:buNone/>
-            </a:pPr>
-            <a:r>
-              <a:rPr lang="en-US" sz="800" dirty="0">
+            <a:off x="8144256" y="1161288"/>
+            <a:ext cx="3733800" cy="146304"/>
+          </a:xfrm>
+          <a:prstGeom prst="rect">
+            <a:avLst/>
+          </a:prstGeom>
+          <a:noFill/>
+          <a:ln/>
+        </p:spPr>
+        <p:txBody>
+          <a:bodyPr wrap="square" lIns="0" tIns="0" rIns="0" bIns="0" rtlCol="0" anchor="ctr"/>
+          <a:lstStyle/>
+          <a:p>
+            <a:pPr algn="ctr" indent="0" marL="0">
+              <a:buNone/>
+            </a:pPr>
+            <a:r>
+              <a:rPr lang="en-US" sz="780" dirty="0">
                 <a:solidFill>
                   <a:srgbClr val="98A2AC"/>
                 </a:solidFill>
@@ -1382,9 +1382,9 @@
                 <a:ea typeface="Microsoft YaHei" pitchFamily="34" charset="-122"/>
                 <a:cs typeface="Microsoft YaHei" pitchFamily="34" charset="-120"/>
               </a:rPr>
-              <a:t>HTTP REST API · JSON/UTF-8 · 17 个接口</a:t>
-            </a:r>
-            <a:endParaRPr lang="en-US" sz="800" dirty="0"/>
+              <a:t>订单 · 库存 · 商品 · 波次</a:t>
+            </a:r>
+            <a:endParaRPr lang="en-US" sz="780" dirty="0"/>
           </a:p>
         </p:txBody>
       </p:sp>
@@ -1396,24 +1396,24 @@
         </p:nvSpPr>
         <p:spPr>
           <a:xfrm>
-            <a:off x="2377440" y="1517904"/>
-            <a:ext cx="7406640" cy="128016"/>
-          </a:xfrm>
-          <a:prstGeom prst="rect">
-            <a:avLst/>
-          </a:prstGeom>
-          <a:noFill/>
-          <a:ln/>
-        </p:spPr>
-        <p:txBody>
-          <a:bodyPr wrap="square" lIns="0" tIns="0" rIns="0" bIns="0" rtlCol="0" anchor="ctr"/>
-          <a:lstStyle/>
-          <a:p>
-            <a:pPr algn="ctr" indent="0" marL="0">
-              <a:buNone/>
-            </a:pPr>
-            <a:r>
-              <a:rPr lang="en-US" sz="800" dirty="0">
+            <a:off x="2743200" y="1371600"/>
+            <a:ext cx="6675120" cy="118872"/>
+          </a:xfrm>
+          <a:prstGeom prst="rect">
+            <a:avLst/>
+          </a:prstGeom>
+          <a:noFill/>
+          <a:ln/>
+        </p:spPr>
+        <p:txBody>
+          <a:bodyPr wrap="square" lIns="0" tIns="0" rIns="0" bIns="0" rtlCol="0" anchor="ctr"/>
+          <a:lstStyle/>
+          <a:p>
+            <a:pPr algn="ctr" indent="0" marL="0">
+              <a:buNone/>
+            </a:pPr>
+            <a:r>
+              <a:rPr lang="en-US" sz="780" dirty="0">
                 <a:solidFill>
                   <a:srgbClr val="8A929B"/>
                 </a:solidFill>
@@ -1421,9 +1421,9 @@
                 <a:ea typeface="Microsoft YaHei" pitchFamily="34" charset="-122"/>
                 <a:cs typeface="Microsoft YaHei" pitchFamily="34" charset="-120"/>
               </a:rPr>
-              <a:t>标准指令双向交互：下行指令 / 上行状态，统一经 WCS</a:t>
-            </a:r>
-            <a:endParaRPr lang="en-US" sz="800" dirty="0"/>
+              <a:t>标准指令双向交互：下行指令 / 上行状态</a:t>
+            </a:r>
+            <a:endParaRPr lang="en-US" sz="780" dirty="0"/>
           </a:p>
         </p:txBody>
       </p:sp>
@@ -1435,8 +1435,8 @@
         </p:nvSpPr>
         <p:spPr>
           <a:xfrm>
-            <a:off x="2177796" y="1645920"/>
-            <a:ext cx="0" cy="100584"/>
+            <a:off x="2177796" y="1490472"/>
+            <a:ext cx="0" cy="91440"/>
           </a:xfrm>
           <a:prstGeom prst="line">
             <a:avLst/>
@@ -1460,8 +1460,8 @@
         </p:nvSpPr>
         <p:spPr>
           <a:xfrm>
-            <a:off x="6094476" y="1645920"/>
-            <a:ext cx="0" cy="100584"/>
+            <a:off x="6094476" y="1490472"/>
+            <a:ext cx="0" cy="91440"/>
           </a:xfrm>
           <a:prstGeom prst="line">
             <a:avLst/>
@@ -1485,8 +1485,8 @@
         </p:nvSpPr>
         <p:spPr>
           <a:xfrm>
-            <a:off x="10011156" y="1645920"/>
-            <a:ext cx="0" cy="100584"/>
+            <a:off x="10011156" y="1490472"/>
+            <a:ext cx="0" cy="91440"/>
           </a:xfrm>
           <a:prstGeom prst="line">
             <a:avLst/>
@@ -1510,7 +1510,7 @@
         </p:nvSpPr>
         <p:spPr>
           <a:xfrm>
-            <a:off x="310896" y="1773936"/>
+            <a:off x="310896" y="1591056"/>
             <a:ext cx="11567160" cy="2249424"/>
           </a:xfrm>
           <a:prstGeom prst="roundRect">
@@ -1521,7 +1521,7 @@
           <a:solidFill>
             <a:srgbClr val="FFFFFF"/>
           </a:solidFill>
-          <a:ln w="12700">
+          <a:ln w="15875">
             <a:solidFill>
               <a:srgbClr val="AAC2D6"/>
             </a:solidFill>
@@ -1537,7 +1537,7 @@
         </p:nvSpPr>
         <p:spPr>
           <a:xfrm>
-            <a:off x="457200" y="1847088"/>
+            <a:off x="457200" y="1664208"/>
             <a:ext cx="11274552" cy="402336"/>
           </a:xfrm>
           <a:prstGeom prst="roundRect">
@@ -1559,7 +1559,7 @@
         </p:nvSpPr>
         <p:spPr>
           <a:xfrm>
-            <a:off x="457200" y="1883664"/>
+            <a:off x="457200" y="1700784"/>
             <a:ext cx="11274552" cy="201168"/>
           </a:xfrm>
           <a:prstGeom prst="rect">
@@ -1584,7 +1584,7 @@
                 <a:ea typeface="Microsoft YaHei" pitchFamily="34" charset="-122"/>
                 <a:cs typeface="Microsoft YaHei" pitchFamily="34" charset="-120"/>
               </a:rPr>
-              <a:t>WCS · 仓储自动化统一调度引擎</a:t>
+              <a:t>WCS · 仓储自动化统一调度引擎（重点）</a:t>
             </a:r>
             <a:endParaRPr lang="en-US" sz="1400" dirty="0"/>
           </a:p>
@@ -1598,7 +1598,7 @@
         </p:nvSpPr>
         <p:spPr>
           <a:xfrm>
-            <a:off x="457200" y="2075688"/>
+            <a:off x="457200" y="1892808"/>
             <a:ext cx="11274552" cy="146304"/>
           </a:xfrm>
           <a:prstGeom prst="rect">
@@ -1637,7 +1637,46 @@
         </p:nvSpPr>
         <p:spPr>
           <a:xfrm>
-            <a:off x="457200" y="2304288"/>
+            <a:off x="457200" y="2103120"/>
+            <a:ext cx="11274552" cy="137160"/>
+          </a:xfrm>
+          <a:prstGeom prst="rect">
+            <a:avLst/>
+          </a:prstGeom>
+          <a:noFill/>
+          <a:ln/>
+        </p:spPr>
+        <p:txBody>
+          <a:bodyPr wrap="square" lIns="0" tIns="0" rIns="0" bIns="0" rtlCol="0" anchor="ctr"/>
+          <a:lstStyle/>
+          <a:p>
+            <a:pPr algn="ctr" indent="0" marL="0">
+              <a:buNone/>
+            </a:pPr>
+            <a:r>
+              <a:rPr lang="en-US" sz="780" dirty="0">
+                <a:solidFill>
+                  <a:srgbClr val="8A929B"/>
+                </a:solidFill>
+                <a:latin typeface="Microsoft YaHei" pitchFamily="34" charset="0"/>
+                <a:ea typeface="Microsoft YaHei" pitchFamily="34" charset="-122"/>
+                <a:cs typeface="Microsoft YaHei" pitchFamily="34" charset="-120"/>
+              </a:rPr>
+              <a:t>FC WMS 与海柔系统不直连：统一经 WCS 以标准指令集下发任务 / 回传状态，按设备能力分层调度，供应商可插拔扩展</a:t>
+            </a:r>
+            <a:endParaRPr lang="en-US" sz="780" dirty="0"/>
+          </a:p>
+        </p:txBody>
+      </p:sp>
+      <p:sp>
+        <p:nvSpPr>
+          <p:cNvPr id="26" name="Text 24"/>
+          <p:cNvSpPr/>
+          <p:nvPr/>
+        </p:nvSpPr>
+        <p:spPr>
+          <a:xfrm>
+            <a:off x="457200" y="2286000"/>
             <a:ext cx="5486400" cy="164592"/>
           </a:xfrm>
           <a:prstGeom prst="rect">
@@ -1684,13 +1723,13 @@
       </p:sp>
       <p:sp>
         <p:nvSpPr>
-          <p:cNvPr id="26" name="Text 24"/>
-          <p:cNvSpPr/>
-          <p:nvPr/>
-        </p:nvSpPr>
-        <p:spPr>
-          <a:xfrm>
-            <a:off x="8805672" y="2304288"/>
+          <p:cNvPr id="27" name="Text 25"/>
+          <p:cNvSpPr/>
+          <p:nvPr/>
+        </p:nvSpPr>
+        <p:spPr>
+          <a:xfrm>
+            <a:off x="8805672" y="2286000"/>
             <a:ext cx="2926080" cy="164592"/>
           </a:xfrm>
           <a:prstGeom prst="rect">
@@ -1723,13 +1762,13 @@
       </p:sp>
       <p:sp>
         <p:nvSpPr>
-          <p:cNvPr id="27" name="Shape 25"/>
-          <p:cNvSpPr/>
-          <p:nvPr/>
-        </p:nvSpPr>
-        <p:spPr>
-          <a:xfrm>
-            <a:off x="457200" y="2468880"/>
+          <p:cNvPr id="28" name="Shape 26"/>
+          <p:cNvSpPr/>
+          <p:nvPr/>
+        </p:nvSpPr>
+        <p:spPr>
+          <a:xfrm>
+            <a:off x="457200" y="2432304"/>
             <a:ext cx="1802892" cy="310896"/>
           </a:xfrm>
           <a:prstGeom prst="roundRect">
@@ -1750,14 +1789,14 @@
       </p:sp>
       <p:sp>
         <p:nvSpPr>
-          <p:cNvPr id="28" name="Text 26"/>
-          <p:cNvSpPr/>
-          <p:nvPr/>
-        </p:nvSpPr>
-        <p:spPr>
-          <a:xfrm>
-            <a:off x="457200" y="2514600"/>
-            <a:ext cx="1802892" cy="182880"/>
+          <p:cNvPr id="29" name="Text 27"/>
+          <p:cNvSpPr/>
+          <p:nvPr/>
+        </p:nvSpPr>
+        <p:spPr>
+          <a:xfrm>
+            <a:off x="457200" y="2473452"/>
+            <a:ext cx="1802892" cy="141732"/>
           </a:xfrm>
           <a:prstGeom prst="rect">
             <a:avLst/>
@@ -1789,30 +1828,30 @@
       </p:sp>
       <p:sp>
         <p:nvSpPr>
-          <p:cNvPr id="29" name="Text 27"/>
-          <p:cNvSpPr/>
-          <p:nvPr/>
-        </p:nvSpPr>
-        <p:spPr>
-          <a:xfrm>
-            <a:off x="457200" y="2587752"/>
-            <a:ext cx="1802892" cy="155448"/>
-          </a:xfrm>
-          <a:prstGeom prst="rect">
-            <a:avLst/>
-          </a:prstGeom>
-          <a:noFill/>
-          <a:ln/>
-        </p:spPr>
-        <p:txBody>
-          <a:bodyPr wrap="square" lIns="0" tIns="0" rIns="0" bIns="0" rtlCol="0" anchor="ctr"/>
-          <a:lstStyle/>
-          <a:p>
-            <a:pPr algn="ctr" indent="0" marL="0">
-              <a:buNone/>
-            </a:pPr>
-            <a:r>
-              <a:rPr lang="en-US" sz="730" dirty="0">
+          <p:cNvPr id="30" name="Text 28"/>
+          <p:cNvSpPr/>
+          <p:nvPr/>
+        </p:nvSpPr>
+        <p:spPr>
+          <a:xfrm>
+            <a:off x="457200" y="2592324"/>
+            <a:ext cx="1802892" cy="118872"/>
+          </a:xfrm>
+          <a:prstGeom prst="rect">
+            <a:avLst/>
+          </a:prstGeom>
+          <a:noFill/>
+          <a:ln/>
+        </p:spPr>
+        <p:txBody>
+          <a:bodyPr wrap="square" lIns="0" tIns="0" rIns="0" bIns="0" rtlCol="0" anchor="ctr"/>
+          <a:lstStyle/>
+          <a:p>
+            <a:pPr algn="ctr" indent="0" marL="0">
+              <a:buNone/>
+            </a:pPr>
+            <a:r>
+              <a:rPr lang="en-US" sz="700" dirty="0">
                 <a:solidFill>
                   <a:srgbClr val="98A2AC"/>
                 </a:solidFill>
@@ -1822,19 +1861,19 @@
               </a:rPr>
               <a:t>多任务并行</a:t>
             </a:r>
-            <a:endParaRPr lang="en-US" sz="730" dirty="0"/>
-          </a:p>
-        </p:txBody>
-      </p:sp>
-      <p:sp>
-        <p:nvSpPr>
-          <p:cNvPr id="30" name="Shape 28"/>
-          <p:cNvSpPr/>
-          <p:nvPr/>
-        </p:nvSpPr>
-        <p:spPr>
-          <a:xfrm>
-            <a:off x="2351532" y="2468880"/>
+            <a:endParaRPr lang="en-US" sz="700" dirty="0"/>
+          </a:p>
+        </p:txBody>
+      </p:sp>
+      <p:sp>
+        <p:nvSpPr>
+          <p:cNvPr id="31" name="Shape 29"/>
+          <p:cNvSpPr/>
+          <p:nvPr/>
+        </p:nvSpPr>
+        <p:spPr>
+          <a:xfrm>
+            <a:off x="2351532" y="2432304"/>
             <a:ext cx="1802892" cy="310896"/>
           </a:xfrm>
           <a:prstGeom prst="roundRect">
@@ -1855,14 +1894,14 @@
       </p:sp>
       <p:sp>
         <p:nvSpPr>
-          <p:cNvPr id="31" name="Text 29"/>
-          <p:cNvSpPr/>
-          <p:nvPr/>
-        </p:nvSpPr>
-        <p:spPr>
-          <a:xfrm>
-            <a:off x="2351532" y="2514600"/>
-            <a:ext cx="1802892" cy="182880"/>
+          <p:cNvPr id="32" name="Text 30"/>
+          <p:cNvSpPr/>
+          <p:nvPr/>
+        </p:nvSpPr>
+        <p:spPr>
+          <a:xfrm>
+            <a:off x="2351532" y="2473452"/>
+            <a:ext cx="1802892" cy="141732"/>
           </a:xfrm>
           <a:prstGeom prst="rect">
             <a:avLst/>
@@ -1894,30 +1933,30 @@
       </p:sp>
       <p:sp>
         <p:nvSpPr>
-          <p:cNvPr id="32" name="Text 30"/>
-          <p:cNvSpPr/>
-          <p:nvPr/>
-        </p:nvSpPr>
-        <p:spPr>
-          <a:xfrm>
-            <a:off x="2351532" y="2587752"/>
-            <a:ext cx="1802892" cy="155448"/>
-          </a:xfrm>
-          <a:prstGeom prst="rect">
-            <a:avLst/>
-          </a:prstGeom>
-          <a:noFill/>
-          <a:ln/>
-        </p:spPr>
-        <p:txBody>
-          <a:bodyPr wrap="square" lIns="0" tIns="0" rIns="0" bIns="0" rtlCol="0" anchor="ctr"/>
-          <a:lstStyle/>
-          <a:p>
-            <a:pPr algn="ctr" indent="0" marL="0">
-              <a:buNone/>
-            </a:pPr>
-            <a:r>
-              <a:rPr lang="en-US" sz="730" dirty="0">
+          <p:cNvPr id="33" name="Text 31"/>
+          <p:cNvSpPr/>
+          <p:nvPr/>
+        </p:nvSpPr>
+        <p:spPr>
+          <a:xfrm>
+            <a:off x="2351532" y="2592324"/>
+            <a:ext cx="1802892" cy="118872"/>
+          </a:xfrm>
+          <a:prstGeom prst="rect">
+            <a:avLst/>
+          </a:prstGeom>
+          <a:noFill/>
+          <a:ln/>
+        </p:spPr>
+        <p:txBody>
+          <a:bodyPr wrap="square" lIns="0" tIns="0" rIns="0" bIns="0" rtlCol="0" anchor="ctr"/>
+          <a:lstStyle/>
+          <a:p>
+            <a:pPr algn="ctr" indent="0" marL="0">
+              <a:buNone/>
+            </a:pPr>
+            <a:r>
+              <a:rPr lang="en-US" sz="700" dirty="0">
                 <a:solidFill>
                   <a:srgbClr val="98A2AC"/>
                 </a:solidFill>
@@ -1927,19 +1966,19 @@
               </a:rPr>
               <a:t>SLA 分级</a:t>
             </a:r>
-            <a:endParaRPr lang="en-US" sz="730" dirty="0"/>
-          </a:p>
-        </p:txBody>
-      </p:sp>
-      <p:sp>
-        <p:nvSpPr>
-          <p:cNvPr id="33" name="Shape 31"/>
-          <p:cNvSpPr/>
-          <p:nvPr/>
-        </p:nvSpPr>
-        <p:spPr>
-          <a:xfrm>
-            <a:off x="4245864" y="2468880"/>
+            <a:endParaRPr lang="en-US" sz="700" dirty="0"/>
+          </a:p>
+        </p:txBody>
+      </p:sp>
+      <p:sp>
+        <p:nvSpPr>
+          <p:cNvPr id="34" name="Shape 32"/>
+          <p:cNvSpPr/>
+          <p:nvPr/>
+        </p:nvSpPr>
+        <p:spPr>
+          <a:xfrm>
+            <a:off x="4245864" y="2432304"/>
             <a:ext cx="1802892" cy="310896"/>
           </a:xfrm>
           <a:prstGeom prst="roundRect">
@@ -1960,14 +1999,14 @@
       </p:sp>
       <p:sp>
         <p:nvSpPr>
-          <p:cNvPr id="34" name="Text 32"/>
-          <p:cNvSpPr/>
-          <p:nvPr/>
-        </p:nvSpPr>
-        <p:spPr>
-          <a:xfrm>
-            <a:off x="4245864" y="2514600"/>
-            <a:ext cx="1802892" cy="182880"/>
+          <p:cNvPr id="35" name="Text 33"/>
+          <p:cNvSpPr/>
+          <p:nvPr/>
+        </p:nvSpPr>
+        <p:spPr>
+          <a:xfrm>
+            <a:off x="4245864" y="2473452"/>
+            <a:ext cx="1802892" cy="141732"/>
           </a:xfrm>
           <a:prstGeom prst="rect">
             <a:avLst/>
@@ -1999,30 +2038,30 @@
       </p:sp>
       <p:sp>
         <p:nvSpPr>
-          <p:cNvPr id="35" name="Text 33"/>
-          <p:cNvSpPr/>
-          <p:nvPr/>
-        </p:nvSpPr>
-        <p:spPr>
-          <a:xfrm>
-            <a:off x="4245864" y="2587752"/>
-            <a:ext cx="1802892" cy="155448"/>
-          </a:xfrm>
-          <a:prstGeom prst="rect">
-            <a:avLst/>
-          </a:prstGeom>
-          <a:noFill/>
-          <a:ln/>
-        </p:spPr>
-        <p:txBody>
-          <a:bodyPr wrap="square" lIns="0" tIns="0" rIns="0" bIns="0" rtlCol="0" anchor="ctr"/>
-          <a:lstStyle/>
-          <a:p>
-            <a:pPr algn="ctr" indent="0" marL="0">
-              <a:buNone/>
-            </a:pPr>
-            <a:r>
-              <a:rPr lang="en-US" sz="730" dirty="0">
+          <p:cNvPr id="36" name="Text 34"/>
+          <p:cNvSpPr/>
+          <p:nvPr/>
+        </p:nvSpPr>
+        <p:spPr>
+          <a:xfrm>
+            <a:off x="4245864" y="2592324"/>
+            <a:ext cx="1802892" cy="118872"/>
+          </a:xfrm>
+          <a:prstGeom prst="rect">
+            <a:avLst/>
+          </a:prstGeom>
+          <a:noFill/>
+          <a:ln/>
+        </p:spPr>
+        <p:txBody>
+          <a:bodyPr wrap="square" lIns="0" tIns="0" rIns="0" bIns="0" rtlCol="0" anchor="ctr"/>
+          <a:lstStyle/>
+          <a:p>
+            <a:pPr algn="ctr" indent="0" marL="0">
+              <a:buNone/>
+            </a:pPr>
+            <a:r>
+              <a:rPr lang="en-US" sz="700" dirty="0">
                 <a:solidFill>
                   <a:srgbClr val="98A2AC"/>
                 </a:solidFill>
@@ -2032,19 +2071,19 @@
               </a:rPr>
               <a:t>最优匹配</a:t>
             </a:r>
-            <a:endParaRPr lang="en-US" sz="730" dirty="0"/>
-          </a:p>
-        </p:txBody>
-      </p:sp>
-      <p:sp>
-        <p:nvSpPr>
-          <p:cNvPr id="36" name="Shape 34"/>
-          <p:cNvSpPr/>
-          <p:nvPr/>
-        </p:nvSpPr>
-        <p:spPr>
-          <a:xfrm>
-            <a:off x="6140196" y="2468880"/>
+            <a:endParaRPr lang="en-US" sz="700" dirty="0"/>
+          </a:p>
+        </p:txBody>
+      </p:sp>
+      <p:sp>
+        <p:nvSpPr>
+          <p:cNvPr id="37" name="Shape 35"/>
+          <p:cNvSpPr/>
+          <p:nvPr/>
+        </p:nvSpPr>
+        <p:spPr>
+          <a:xfrm>
+            <a:off x="6140196" y="2432304"/>
             <a:ext cx="1802892" cy="310896"/>
           </a:xfrm>
           <a:prstGeom prst="roundRect">
@@ -2065,14 +2104,14 @@
       </p:sp>
       <p:sp>
         <p:nvSpPr>
-          <p:cNvPr id="37" name="Text 35"/>
-          <p:cNvSpPr/>
-          <p:nvPr/>
-        </p:nvSpPr>
-        <p:spPr>
-          <a:xfrm>
-            <a:off x="6140196" y="2514600"/>
-            <a:ext cx="1802892" cy="182880"/>
+          <p:cNvPr id="38" name="Text 36"/>
+          <p:cNvSpPr/>
+          <p:nvPr/>
+        </p:nvSpPr>
+        <p:spPr>
+          <a:xfrm>
+            <a:off x="6140196" y="2473452"/>
+            <a:ext cx="1802892" cy="141732"/>
           </a:xfrm>
           <a:prstGeom prst="rect">
             <a:avLst/>
@@ -2104,30 +2143,30 @@
       </p:sp>
       <p:sp>
         <p:nvSpPr>
-          <p:cNvPr id="38" name="Text 36"/>
-          <p:cNvSpPr/>
-          <p:nvPr/>
-        </p:nvSpPr>
-        <p:spPr>
-          <a:xfrm>
-            <a:off x="6140196" y="2587752"/>
-            <a:ext cx="1802892" cy="155448"/>
-          </a:xfrm>
-          <a:prstGeom prst="rect">
-            <a:avLst/>
-          </a:prstGeom>
-          <a:noFill/>
-          <a:ln/>
-        </p:spPr>
-        <p:txBody>
-          <a:bodyPr wrap="square" lIns="0" tIns="0" rIns="0" bIns="0" rtlCol="0" anchor="ctr"/>
-          <a:lstStyle/>
-          <a:p>
-            <a:pPr algn="ctr" indent="0" marL="0">
-              <a:buNone/>
-            </a:pPr>
-            <a:r>
-              <a:rPr lang="en-US" sz="730" dirty="0">
+          <p:cNvPr id="39" name="Text 37"/>
+          <p:cNvSpPr/>
+          <p:nvPr/>
+        </p:nvSpPr>
+        <p:spPr>
+          <a:xfrm>
+            <a:off x="6140196" y="2592324"/>
+            <a:ext cx="1802892" cy="118872"/>
+          </a:xfrm>
+          <a:prstGeom prst="rect">
+            <a:avLst/>
+          </a:prstGeom>
+          <a:noFill/>
+          <a:ln/>
+        </p:spPr>
+        <p:txBody>
+          <a:bodyPr wrap="square" lIns="0" tIns="0" rIns="0" bIns="0" rtlCol="0" anchor="ctr"/>
+          <a:lstStyle/>
+          <a:p>
+            <a:pPr algn="ctr" indent="0" marL="0">
+              <a:buNone/>
+            </a:pPr>
+            <a:r>
+              <a:rPr lang="en-US" sz="700" dirty="0">
                 <a:solidFill>
                   <a:srgbClr val="98A2AC"/>
                 </a:solidFill>
@@ -2137,19 +2176,19 @@
               </a:rPr>
               <a:t>峰值保护</a:t>
             </a:r>
-            <a:endParaRPr lang="en-US" sz="730" dirty="0"/>
-          </a:p>
-        </p:txBody>
-      </p:sp>
-      <p:sp>
-        <p:nvSpPr>
-          <p:cNvPr id="39" name="Shape 37"/>
-          <p:cNvSpPr/>
-          <p:nvPr/>
-        </p:nvSpPr>
-        <p:spPr>
-          <a:xfrm>
-            <a:off x="8034528" y="2468880"/>
+            <a:endParaRPr lang="en-US" sz="700" dirty="0"/>
+          </a:p>
+        </p:txBody>
+      </p:sp>
+      <p:sp>
+        <p:nvSpPr>
+          <p:cNvPr id="40" name="Shape 38"/>
+          <p:cNvSpPr/>
+          <p:nvPr/>
+        </p:nvSpPr>
+        <p:spPr>
+          <a:xfrm>
+            <a:off x="8034528" y="2432304"/>
             <a:ext cx="1802892" cy="310896"/>
           </a:xfrm>
           <a:prstGeom prst="roundRect">
@@ -2170,14 +2209,14 @@
       </p:sp>
       <p:sp>
         <p:nvSpPr>
-          <p:cNvPr id="40" name="Text 38"/>
-          <p:cNvSpPr/>
-          <p:nvPr/>
-        </p:nvSpPr>
-        <p:spPr>
-          <a:xfrm>
-            <a:off x="8034528" y="2514600"/>
-            <a:ext cx="1802892" cy="182880"/>
+          <p:cNvPr id="41" name="Text 39"/>
+          <p:cNvSpPr/>
+          <p:nvPr/>
+        </p:nvSpPr>
+        <p:spPr>
+          <a:xfrm>
+            <a:off x="8034528" y="2473452"/>
+            <a:ext cx="1802892" cy="141732"/>
           </a:xfrm>
           <a:prstGeom prst="rect">
             <a:avLst/>
@@ -2209,30 +2248,30 @@
       </p:sp>
       <p:sp>
         <p:nvSpPr>
-          <p:cNvPr id="41" name="Text 39"/>
-          <p:cNvSpPr/>
-          <p:nvPr/>
-        </p:nvSpPr>
-        <p:spPr>
-          <a:xfrm>
-            <a:off x="8034528" y="2587752"/>
-            <a:ext cx="1802892" cy="155448"/>
-          </a:xfrm>
-          <a:prstGeom prst="rect">
-            <a:avLst/>
-          </a:prstGeom>
-          <a:noFill/>
-          <a:ln/>
-        </p:spPr>
-        <p:txBody>
-          <a:bodyPr wrap="square" lIns="0" tIns="0" rIns="0" bIns="0" rtlCol="0" anchor="ctr"/>
-          <a:lstStyle/>
-          <a:p>
-            <a:pPr algn="ctr" indent="0" marL="0">
-              <a:buNone/>
-            </a:pPr>
-            <a:r>
-              <a:rPr lang="en-US" sz="730" dirty="0">
+          <p:cNvPr id="42" name="Text 40"/>
+          <p:cNvSpPr/>
+          <p:nvPr/>
+        </p:nvSpPr>
+        <p:spPr>
+          <a:xfrm>
+            <a:off x="8034528" y="2592324"/>
+            <a:ext cx="1802892" cy="118872"/>
+          </a:xfrm>
+          <a:prstGeom prst="rect">
+            <a:avLst/>
+          </a:prstGeom>
+          <a:noFill/>
+          <a:ln/>
+        </p:spPr>
+        <p:txBody>
+          <a:bodyPr wrap="square" lIns="0" tIns="0" rIns="0" bIns="0" rtlCol="0" anchor="ctr"/>
+          <a:lstStyle/>
+          <a:p>
+            <a:pPr algn="ctr" indent="0" marL="0">
+              <a:buNone/>
+            </a:pPr>
+            <a:r>
+              <a:rPr lang="en-US" sz="700" dirty="0">
                 <a:solidFill>
                   <a:srgbClr val="98A2AC"/>
                 </a:solidFill>
@@ -2242,19 +2281,19 @@
               </a:rPr>
               <a:t>失败重试</a:t>
             </a:r>
-            <a:endParaRPr lang="en-US" sz="730" dirty="0"/>
-          </a:p>
-        </p:txBody>
-      </p:sp>
-      <p:sp>
-        <p:nvSpPr>
-          <p:cNvPr id="42" name="Shape 40"/>
-          <p:cNvSpPr/>
-          <p:nvPr/>
-        </p:nvSpPr>
-        <p:spPr>
-          <a:xfrm>
-            <a:off x="9928860" y="2468880"/>
+            <a:endParaRPr lang="en-US" sz="700" dirty="0"/>
+          </a:p>
+        </p:txBody>
+      </p:sp>
+      <p:sp>
+        <p:nvSpPr>
+          <p:cNvPr id="43" name="Shape 41"/>
+          <p:cNvSpPr/>
+          <p:nvPr/>
+        </p:nvSpPr>
+        <p:spPr>
+          <a:xfrm>
+            <a:off x="9928860" y="2432304"/>
             <a:ext cx="1802892" cy="310896"/>
           </a:xfrm>
           <a:prstGeom prst="roundRect">
@@ -2275,14 +2314,14 @@
       </p:sp>
       <p:sp>
         <p:nvSpPr>
-          <p:cNvPr id="43" name="Text 41"/>
-          <p:cNvSpPr/>
-          <p:nvPr/>
-        </p:nvSpPr>
-        <p:spPr>
-          <a:xfrm>
-            <a:off x="9928860" y="2514600"/>
-            <a:ext cx="1802892" cy="182880"/>
+          <p:cNvPr id="44" name="Text 42"/>
+          <p:cNvSpPr/>
+          <p:nvPr/>
+        </p:nvSpPr>
+        <p:spPr>
+          <a:xfrm>
+            <a:off x="9928860" y="2473452"/>
+            <a:ext cx="1802892" cy="141732"/>
           </a:xfrm>
           <a:prstGeom prst="rect">
             <a:avLst/>
@@ -2314,30 +2353,30 @@
       </p:sp>
       <p:sp>
         <p:nvSpPr>
-          <p:cNvPr id="44" name="Text 42"/>
-          <p:cNvSpPr/>
-          <p:nvPr/>
-        </p:nvSpPr>
-        <p:spPr>
-          <a:xfrm>
-            <a:off x="9928860" y="2587752"/>
-            <a:ext cx="1802892" cy="155448"/>
-          </a:xfrm>
-          <a:prstGeom prst="rect">
-            <a:avLst/>
-          </a:prstGeom>
-          <a:noFill/>
-          <a:ln/>
-        </p:spPr>
-        <p:txBody>
-          <a:bodyPr wrap="square" lIns="0" tIns="0" rIns="0" bIns="0" rtlCol="0" anchor="ctr"/>
-          <a:lstStyle/>
-          <a:p>
-            <a:pPr algn="ctr" indent="0" marL="0">
-              <a:buNone/>
-            </a:pPr>
-            <a:r>
-              <a:rPr lang="en-US" sz="730" dirty="0">
+          <p:cNvPr id="45" name="Text 43"/>
+          <p:cNvSpPr/>
+          <p:nvPr/>
+        </p:nvSpPr>
+        <p:spPr>
+          <a:xfrm>
+            <a:off x="9928860" y="2592324"/>
+            <a:ext cx="1802892" cy="118872"/>
+          </a:xfrm>
+          <a:prstGeom prst="rect">
+            <a:avLst/>
+          </a:prstGeom>
+          <a:noFill/>
+          <a:ln/>
+        </p:spPr>
+        <p:txBody>
+          <a:bodyPr wrap="square" lIns="0" tIns="0" rIns="0" bIns="0" rtlCol="0" anchor="ctr"/>
+          <a:lstStyle/>
+          <a:p>
+            <a:pPr algn="ctr" indent="0" marL="0">
+              <a:buNone/>
+            </a:pPr>
+            <a:r>
+              <a:rPr lang="en-US" sz="700" dirty="0">
                 <a:solidFill>
                   <a:srgbClr val="98A2AC"/>
                 </a:solidFill>
@@ -2347,19 +2386,19 @@
               </a:rPr>
               <a:t>时效预警</a:t>
             </a:r>
-            <a:endParaRPr lang="en-US" sz="730" dirty="0"/>
-          </a:p>
-        </p:txBody>
-      </p:sp>
-      <p:sp>
-        <p:nvSpPr>
-          <p:cNvPr id="45" name="Text 43"/>
-          <p:cNvSpPr/>
-          <p:nvPr/>
-        </p:nvSpPr>
-        <p:spPr>
-          <a:xfrm>
-            <a:off x="457200" y="2834640"/>
+            <a:endParaRPr lang="en-US" sz="700" dirty="0"/>
+          </a:p>
+        </p:txBody>
+      </p:sp>
+      <p:sp>
+        <p:nvSpPr>
+          <p:cNvPr id="46" name="Text 44"/>
+          <p:cNvSpPr/>
+          <p:nvPr/>
+        </p:nvSpPr>
+        <p:spPr>
+          <a:xfrm>
+            <a:off x="457200" y="2779776"/>
             <a:ext cx="5486400" cy="164592"/>
           </a:xfrm>
           <a:prstGeom prst="rect">
@@ -2406,13 +2445,13 @@
       </p:sp>
       <p:sp>
         <p:nvSpPr>
-          <p:cNvPr id="46" name="Text 44"/>
-          <p:cNvSpPr/>
-          <p:nvPr/>
-        </p:nvSpPr>
-        <p:spPr>
-          <a:xfrm>
-            <a:off x="8805672" y="2834640"/>
+          <p:cNvPr id="47" name="Text 45"/>
+          <p:cNvSpPr/>
+          <p:nvPr/>
+        </p:nvSpPr>
+        <p:spPr>
+          <a:xfrm>
+            <a:off x="8805672" y="2779776"/>
             <a:ext cx="2926080" cy="164592"/>
           </a:xfrm>
           <a:prstGeom prst="rect">
@@ -2445,13 +2484,13 @@
       </p:sp>
       <p:sp>
         <p:nvSpPr>
-          <p:cNvPr id="47" name="Shape 45"/>
-          <p:cNvSpPr/>
-          <p:nvPr/>
-        </p:nvSpPr>
-        <p:spPr>
-          <a:xfrm>
-            <a:off x="457200" y="2999232"/>
+          <p:cNvPr id="48" name="Shape 46"/>
+          <p:cNvSpPr/>
+          <p:nvPr/>
+        </p:nvSpPr>
+        <p:spPr>
+          <a:xfrm>
+            <a:off x="457200" y="2926080"/>
             <a:ext cx="1329309" cy="310896"/>
           </a:xfrm>
           <a:prstGeom prst="roundRect">
@@ -2472,14 +2511,14 @@
       </p:sp>
       <p:sp>
         <p:nvSpPr>
-          <p:cNvPr id="48" name="Text 46"/>
-          <p:cNvSpPr/>
-          <p:nvPr/>
-        </p:nvSpPr>
-        <p:spPr>
-          <a:xfrm>
-            <a:off x="457200" y="3044952"/>
-            <a:ext cx="1329309" cy="182880"/>
+          <p:cNvPr id="49" name="Text 47"/>
+          <p:cNvSpPr/>
+          <p:nvPr/>
+        </p:nvSpPr>
+        <p:spPr>
+          <a:xfrm>
+            <a:off x="457200" y="2967228"/>
+            <a:ext cx="1329309" cy="141732"/>
           </a:xfrm>
           <a:prstGeom prst="rect">
             <a:avLst/>
@@ -2511,30 +2550,30 @@
       </p:sp>
       <p:sp>
         <p:nvSpPr>
-          <p:cNvPr id="49" name="Text 47"/>
-          <p:cNvSpPr/>
-          <p:nvPr/>
-        </p:nvSpPr>
-        <p:spPr>
-          <a:xfrm>
-            <a:off x="457200" y="3118104"/>
-            <a:ext cx="1329309" cy="155448"/>
-          </a:xfrm>
-          <a:prstGeom prst="rect">
-            <a:avLst/>
-          </a:prstGeom>
-          <a:noFill/>
-          <a:ln/>
-        </p:spPr>
-        <p:txBody>
-          <a:bodyPr wrap="square" lIns="0" tIns="0" rIns="0" bIns="0" rtlCol="0" anchor="ctr"/>
-          <a:lstStyle/>
-          <a:p>
-            <a:pPr algn="ctr" indent="0" marL="0">
-              <a:buNone/>
-            </a:pPr>
-            <a:r>
-              <a:rPr lang="en-US" sz="730" dirty="0">
+          <p:cNvPr id="50" name="Text 48"/>
+          <p:cNvSpPr/>
+          <p:nvPr/>
+        </p:nvSpPr>
+        <p:spPr>
+          <a:xfrm>
+            <a:off x="457200" y="3086100"/>
+            <a:ext cx="1329309" cy="118872"/>
+          </a:xfrm>
+          <a:prstGeom prst="rect">
+            <a:avLst/>
+          </a:prstGeom>
+          <a:noFill/>
+          <a:ln/>
+        </p:spPr>
+        <p:txBody>
+          <a:bodyPr wrap="square" lIns="0" tIns="0" rIns="0" bIns="0" rtlCol="0" anchor="ctr"/>
+          <a:lstStyle/>
+          <a:p>
+            <a:pPr algn="ctr" indent="0" marL="0">
+              <a:buNone/>
+            </a:pPr>
+            <a:r>
+              <a:rPr lang="en-US" sz="700" dirty="0">
                 <a:solidFill>
                   <a:srgbClr val="98A2AC"/>
                 </a:solidFill>
@@ -2544,19 +2583,19 @@
               </a:rPr>
               <a:t>DWS 称重</a:t>
             </a:r>
-            <a:endParaRPr lang="en-US" sz="730" dirty="0"/>
-          </a:p>
-        </p:txBody>
-      </p:sp>
-      <p:sp>
-        <p:nvSpPr>
-          <p:cNvPr id="50" name="Shape 48"/>
-          <p:cNvSpPr/>
-          <p:nvPr/>
-        </p:nvSpPr>
-        <p:spPr>
-          <a:xfrm>
-            <a:off x="1877949" y="2999232"/>
+            <a:endParaRPr lang="en-US" sz="700" dirty="0"/>
+          </a:p>
+        </p:txBody>
+      </p:sp>
+      <p:sp>
+        <p:nvSpPr>
+          <p:cNvPr id="51" name="Shape 49"/>
+          <p:cNvSpPr/>
+          <p:nvPr/>
+        </p:nvSpPr>
+        <p:spPr>
+          <a:xfrm>
+            <a:off x="1877949" y="2926080"/>
             <a:ext cx="1329309" cy="310896"/>
           </a:xfrm>
           <a:prstGeom prst="roundRect">
@@ -2577,14 +2616,14 @@
       </p:sp>
       <p:sp>
         <p:nvSpPr>
-          <p:cNvPr id="51" name="Text 49"/>
-          <p:cNvSpPr/>
-          <p:nvPr/>
-        </p:nvSpPr>
-        <p:spPr>
-          <a:xfrm>
-            <a:off x="1877949" y="3044952"/>
-            <a:ext cx="1329309" cy="182880"/>
+          <p:cNvPr id="52" name="Text 50"/>
+          <p:cNvSpPr/>
+          <p:nvPr/>
+        </p:nvSpPr>
+        <p:spPr>
+          <a:xfrm>
+            <a:off x="1877949" y="2967228"/>
+            <a:ext cx="1329309" cy="141732"/>
           </a:xfrm>
           <a:prstGeom prst="rect">
             <a:avLst/>
@@ -2616,30 +2655,30 @@
       </p:sp>
       <p:sp>
         <p:nvSpPr>
-          <p:cNvPr id="52" name="Text 50"/>
-          <p:cNvSpPr/>
-          <p:nvPr/>
-        </p:nvSpPr>
-        <p:spPr>
-          <a:xfrm>
-            <a:off x="1877949" y="3118104"/>
-            <a:ext cx="1329309" cy="155448"/>
-          </a:xfrm>
-          <a:prstGeom prst="rect">
-            <a:avLst/>
-          </a:prstGeom>
-          <a:noFill/>
-          <a:ln/>
-        </p:spPr>
-        <p:txBody>
-          <a:bodyPr wrap="square" lIns="0" tIns="0" rIns="0" bIns="0" rtlCol="0" anchor="ctr"/>
-          <a:lstStyle/>
-          <a:p>
-            <a:pPr algn="ctr" indent="0" marL="0">
-              <a:buNone/>
-            </a:pPr>
-            <a:r>
-              <a:rPr lang="en-US" sz="730" dirty="0">
+          <p:cNvPr id="53" name="Text 51"/>
+          <p:cNvSpPr/>
+          <p:nvPr/>
+        </p:nvSpPr>
+        <p:spPr>
+          <a:xfrm>
+            <a:off x="1877949" y="3086100"/>
+            <a:ext cx="1329309" cy="118872"/>
+          </a:xfrm>
+          <a:prstGeom prst="rect">
+            <a:avLst/>
+          </a:prstGeom>
+          <a:noFill/>
+          <a:ln/>
+        </p:spPr>
+        <p:txBody>
+          <a:bodyPr wrap="square" lIns="0" tIns="0" rIns="0" bIns="0" rtlCol="0" anchor="ctr"/>
+          <a:lstStyle/>
+          <a:p>
+            <a:pPr algn="ctr" indent="0" marL="0">
+              <a:buNone/>
+            </a:pPr>
+            <a:r>
+              <a:rPr lang="en-US" sz="700" dirty="0">
                 <a:solidFill>
                   <a:srgbClr val="98A2AC"/>
                 </a:solidFill>
@@ -2649,19 +2688,19 @@
               </a:rPr>
               <a:t>返回库位</a:t>
             </a:r>
-            <a:endParaRPr lang="en-US" sz="730" dirty="0"/>
-          </a:p>
-        </p:txBody>
-      </p:sp>
-      <p:sp>
-        <p:nvSpPr>
-          <p:cNvPr id="53" name="Shape 51"/>
-          <p:cNvSpPr/>
-          <p:nvPr/>
-        </p:nvSpPr>
-        <p:spPr>
-          <a:xfrm>
-            <a:off x="3298698" y="2999232"/>
+            <a:endParaRPr lang="en-US" sz="700" dirty="0"/>
+          </a:p>
+        </p:txBody>
+      </p:sp>
+      <p:sp>
+        <p:nvSpPr>
+          <p:cNvPr id="54" name="Shape 52"/>
+          <p:cNvSpPr/>
+          <p:nvPr/>
+        </p:nvSpPr>
+        <p:spPr>
+          <a:xfrm>
+            <a:off x="3298698" y="2926080"/>
             <a:ext cx="1329309" cy="310896"/>
           </a:xfrm>
           <a:prstGeom prst="roundRect">
@@ -2682,14 +2721,14 @@
       </p:sp>
       <p:sp>
         <p:nvSpPr>
-          <p:cNvPr id="54" name="Text 52"/>
-          <p:cNvSpPr/>
-          <p:nvPr/>
-        </p:nvSpPr>
-        <p:spPr>
-          <a:xfrm>
-            <a:off x="3298698" y="3044952"/>
-            <a:ext cx="1329309" cy="182880"/>
+          <p:cNvPr id="55" name="Text 53"/>
+          <p:cNvSpPr/>
+          <p:nvPr/>
+        </p:nvSpPr>
+        <p:spPr>
+          <a:xfrm>
+            <a:off x="3298698" y="2967228"/>
+            <a:ext cx="1329309" cy="141732"/>
           </a:xfrm>
           <a:prstGeom prst="rect">
             <a:avLst/>
@@ -2721,30 +2760,30 @@
       </p:sp>
       <p:sp>
         <p:nvSpPr>
-          <p:cNvPr id="55" name="Text 53"/>
-          <p:cNvSpPr/>
-          <p:nvPr/>
-        </p:nvSpPr>
-        <p:spPr>
-          <a:xfrm>
-            <a:off x="3298698" y="3118104"/>
-            <a:ext cx="1329309" cy="155448"/>
-          </a:xfrm>
-          <a:prstGeom prst="rect">
-            <a:avLst/>
-          </a:prstGeom>
-          <a:noFill/>
-          <a:ln/>
-        </p:spPr>
-        <p:txBody>
-          <a:bodyPr wrap="square" lIns="0" tIns="0" rIns="0" bIns="0" rtlCol="0" anchor="ctr"/>
-          <a:lstStyle/>
-          <a:p>
-            <a:pPr algn="ctr" indent="0" marL="0">
-              <a:buNone/>
-            </a:pPr>
-            <a:r>
-              <a:rPr lang="en-US" sz="730" dirty="0">
+          <p:cNvPr id="56" name="Text 54"/>
+          <p:cNvSpPr/>
+          <p:nvPr/>
+        </p:nvSpPr>
+        <p:spPr>
+          <a:xfrm>
+            <a:off x="3298698" y="3086100"/>
+            <a:ext cx="1329309" cy="118872"/>
+          </a:xfrm>
+          <a:prstGeom prst="rect">
+            <a:avLst/>
+          </a:prstGeom>
+          <a:noFill/>
+          <a:ln/>
+        </p:spPr>
+        <p:txBody>
+          <a:bodyPr wrap="square" lIns="0" tIns="0" rIns="0" bIns="0" rtlCol="0" anchor="ctr"/>
+          <a:lstStyle/>
+          <a:p>
+            <a:pPr algn="ctr" indent="0" marL="0">
+              <a:buNone/>
+            </a:pPr>
+            <a:r>
+              <a:rPr lang="en-US" sz="700" dirty="0">
                 <a:solidFill>
                   <a:srgbClr val="98A2AC"/>
                 </a:solidFill>
@@ -2754,19 +2793,19 @@
               </a:rPr>
               <a:t>货箱到人</a:t>
             </a:r>
-            <a:endParaRPr lang="en-US" sz="730" dirty="0"/>
-          </a:p>
-        </p:txBody>
-      </p:sp>
-      <p:sp>
-        <p:nvSpPr>
-          <p:cNvPr id="56" name="Shape 54"/>
-          <p:cNvSpPr/>
-          <p:nvPr/>
-        </p:nvSpPr>
-        <p:spPr>
-          <a:xfrm>
-            <a:off x="4719447" y="2999232"/>
+            <a:endParaRPr lang="en-US" sz="700" dirty="0"/>
+          </a:p>
+        </p:txBody>
+      </p:sp>
+      <p:sp>
+        <p:nvSpPr>
+          <p:cNvPr id="57" name="Shape 55"/>
+          <p:cNvSpPr/>
+          <p:nvPr/>
+        </p:nvSpPr>
+        <p:spPr>
+          <a:xfrm>
+            <a:off x="4719447" y="2926080"/>
             <a:ext cx="1329309" cy="310896"/>
           </a:xfrm>
           <a:prstGeom prst="roundRect">
@@ -2787,14 +2826,14 @@
       </p:sp>
       <p:sp>
         <p:nvSpPr>
-          <p:cNvPr id="57" name="Text 55"/>
-          <p:cNvSpPr/>
-          <p:nvPr/>
-        </p:nvSpPr>
-        <p:spPr>
-          <a:xfrm>
-            <a:off x="4719447" y="3044952"/>
-            <a:ext cx="1329309" cy="182880"/>
+          <p:cNvPr id="58" name="Text 56"/>
+          <p:cNvSpPr/>
+          <p:nvPr/>
+        </p:nvSpPr>
+        <p:spPr>
+          <a:xfrm>
+            <a:off x="4719447" y="2967228"/>
+            <a:ext cx="1329309" cy="141732"/>
           </a:xfrm>
           <a:prstGeom prst="rect">
             <a:avLst/>
@@ -2826,30 +2865,30 @@
       </p:sp>
       <p:sp>
         <p:nvSpPr>
-          <p:cNvPr id="58" name="Text 56"/>
-          <p:cNvSpPr/>
-          <p:nvPr/>
-        </p:nvSpPr>
-        <p:spPr>
-          <a:xfrm>
-            <a:off x="4719447" y="3118104"/>
-            <a:ext cx="1329309" cy="155448"/>
-          </a:xfrm>
-          <a:prstGeom prst="rect">
-            <a:avLst/>
-          </a:prstGeom>
-          <a:noFill/>
-          <a:ln/>
-        </p:spPr>
-        <p:txBody>
-          <a:bodyPr wrap="square" lIns="0" tIns="0" rIns="0" bIns="0" rtlCol="0" anchor="ctr"/>
-          <a:lstStyle/>
-          <a:p>
-            <a:pPr algn="ctr" indent="0" marL="0">
-              <a:buNone/>
-            </a:pPr>
-            <a:r>
-              <a:rPr lang="en-US" sz="730" dirty="0">
+          <p:cNvPr id="59" name="Text 57"/>
+          <p:cNvSpPr/>
+          <p:nvPr/>
+        </p:nvSpPr>
+        <p:spPr>
+          <a:xfrm>
+            <a:off x="4719447" y="3086100"/>
+            <a:ext cx="1329309" cy="118872"/>
+          </a:xfrm>
+          <a:prstGeom prst="rect">
+            <a:avLst/>
+          </a:prstGeom>
+          <a:noFill/>
+          <a:ln/>
+        </p:spPr>
+        <p:txBody>
+          <a:bodyPr wrap="square" lIns="0" tIns="0" rIns="0" bIns="0" rtlCol="0" anchor="ctr"/>
+          <a:lstStyle/>
+          <a:p>
+            <a:pPr algn="ctr" indent="0" marL="0">
+              <a:buNone/>
+            </a:pPr>
+            <a:r>
+              <a:rPr lang="en-US" sz="700" dirty="0">
                 <a:solidFill>
                   <a:srgbClr val="98A2AC"/>
                 </a:solidFill>
@@ -2859,19 +2898,19 @@
               </a:rPr>
               <a:t>格口/门店</a:t>
             </a:r>
-            <a:endParaRPr lang="en-US" sz="730" dirty="0"/>
-          </a:p>
-        </p:txBody>
-      </p:sp>
-      <p:sp>
-        <p:nvSpPr>
-          <p:cNvPr id="59" name="Shape 57"/>
-          <p:cNvSpPr/>
-          <p:nvPr/>
-        </p:nvSpPr>
-        <p:spPr>
-          <a:xfrm>
-            <a:off x="6140196" y="2999232"/>
+            <a:endParaRPr lang="en-US" sz="700" dirty="0"/>
+          </a:p>
+        </p:txBody>
+      </p:sp>
+      <p:sp>
+        <p:nvSpPr>
+          <p:cNvPr id="60" name="Shape 58"/>
+          <p:cNvSpPr/>
+          <p:nvPr/>
+        </p:nvSpPr>
+        <p:spPr>
+          <a:xfrm>
+            <a:off x="6140196" y="2926080"/>
             <a:ext cx="1329309" cy="310896"/>
           </a:xfrm>
           <a:prstGeom prst="roundRect">
@@ -2892,14 +2931,14 @@
       </p:sp>
       <p:sp>
         <p:nvSpPr>
-          <p:cNvPr id="60" name="Text 58"/>
-          <p:cNvSpPr/>
-          <p:nvPr/>
-        </p:nvSpPr>
-        <p:spPr>
-          <a:xfrm>
-            <a:off x="6140196" y="3044952"/>
-            <a:ext cx="1329309" cy="182880"/>
+          <p:cNvPr id="61" name="Text 59"/>
+          <p:cNvSpPr/>
+          <p:nvPr/>
+        </p:nvSpPr>
+        <p:spPr>
+          <a:xfrm>
+            <a:off x="6140196" y="2967228"/>
+            <a:ext cx="1329309" cy="141732"/>
           </a:xfrm>
           <a:prstGeom prst="rect">
             <a:avLst/>
@@ -2931,30 +2970,30 @@
       </p:sp>
       <p:sp>
         <p:nvSpPr>
-          <p:cNvPr id="61" name="Text 59"/>
-          <p:cNvSpPr/>
-          <p:nvPr/>
-        </p:nvSpPr>
-        <p:spPr>
-          <a:xfrm>
-            <a:off x="6140196" y="3118104"/>
-            <a:ext cx="1329309" cy="155448"/>
-          </a:xfrm>
-          <a:prstGeom prst="rect">
-            <a:avLst/>
-          </a:prstGeom>
-          <a:noFill/>
-          <a:ln/>
-        </p:spPr>
-        <p:txBody>
-          <a:bodyPr wrap="square" lIns="0" tIns="0" rIns="0" bIns="0" rtlCol="0" anchor="ctr"/>
-          <a:lstStyle/>
-          <a:p>
-            <a:pPr algn="ctr" indent="0" marL="0">
-              <a:buNone/>
-            </a:pPr>
-            <a:r>
-              <a:rPr lang="en-US" sz="730" dirty="0">
+          <p:cNvPr id="62" name="Text 60"/>
+          <p:cNvSpPr/>
+          <p:nvPr/>
+        </p:nvSpPr>
+        <p:spPr>
+          <a:xfrm>
+            <a:off x="6140196" y="3086100"/>
+            <a:ext cx="1329309" cy="118872"/>
+          </a:xfrm>
+          <a:prstGeom prst="rect">
+            <a:avLst/>
+          </a:prstGeom>
+          <a:noFill/>
+          <a:ln/>
+        </p:spPr>
+        <p:txBody>
+          <a:bodyPr wrap="square" lIns="0" tIns="0" rIns="0" bIns="0" rtlCol="0" anchor="ctr"/>
+          <a:lstStyle/>
+          <a:p>
+            <a:pPr algn="ctr" indent="0" marL="0">
+              <a:buNone/>
+            </a:pPr>
+            <a:r>
+              <a:rPr lang="en-US" sz="700" dirty="0">
                 <a:solidFill>
                   <a:srgbClr val="98A2AC"/>
                 </a:solidFill>
@@ -2964,19 +3003,19 @@
               </a:rPr>
               <a:t>RFID·物理盘</a:t>
             </a:r>
-            <a:endParaRPr lang="en-US" sz="730" dirty="0"/>
-          </a:p>
-        </p:txBody>
-      </p:sp>
-      <p:sp>
-        <p:nvSpPr>
-          <p:cNvPr id="62" name="Shape 60"/>
-          <p:cNvSpPr/>
-          <p:nvPr/>
-        </p:nvSpPr>
-        <p:spPr>
-          <a:xfrm>
-            <a:off x="7560945" y="2999232"/>
+            <a:endParaRPr lang="en-US" sz="700" dirty="0"/>
+          </a:p>
+        </p:txBody>
+      </p:sp>
+      <p:sp>
+        <p:nvSpPr>
+          <p:cNvPr id="63" name="Shape 61"/>
+          <p:cNvSpPr/>
+          <p:nvPr/>
+        </p:nvSpPr>
+        <p:spPr>
+          <a:xfrm>
+            <a:off x="7560945" y="2926080"/>
             <a:ext cx="1329309" cy="310896"/>
           </a:xfrm>
           <a:prstGeom prst="roundRect">
@@ -2997,14 +3036,14 @@
       </p:sp>
       <p:sp>
         <p:nvSpPr>
-          <p:cNvPr id="63" name="Text 61"/>
-          <p:cNvSpPr/>
-          <p:nvPr/>
-        </p:nvSpPr>
-        <p:spPr>
-          <a:xfrm>
-            <a:off x="7560945" y="3044952"/>
-            <a:ext cx="1329309" cy="182880"/>
+          <p:cNvPr id="64" name="Text 62"/>
+          <p:cNvSpPr/>
+          <p:nvPr/>
+        </p:nvSpPr>
+        <p:spPr>
+          <a:xfrm>
+            <a:off x="7560945" y="2967228"/>
+            <a:ext cx="1329309" cy="141732"/>
           </a:xfrm>
           <a:prstGeom prst="rect">
             <a:avLst/>
@@ -3036,30 +3075,30 @@
       </p:sp>
       <p:sp>
         <p:nvSpPr>
-          <p:cNvPr id="64" name="Text 62"/>
-          <p:cNvSpPr/>
-          <p:nvPr/>
-        </p:nvSpPr>
-        <p:spPr>
-          <a:xfrm>
-            <a:off x="7560945" y="3118104"/>
-            <a:ext cx="1329309" cy="155448"/>
-          </a:xfrm>
-          <a:prstGeom prst="rect">
-            <a:avLst/>
-          </a:prstGeom>
-          <a:noFill/>
-          <a:ln/>
-        </p:spPr>
-        <p:txBody>
-          <a:bodyPr wrap="square" lIns="0" tIns="0" rIns="0" bIns="0" rtlCol="0" anchor="ctr"/>
-          <a:lstStyle/>
-          <a:p>
-            <a:pPr algn="ctr" indent="0" marL="0">
-              <a:buNone/>
-            </a:pPr>
-            <a:r>
-              <a:rPr lang="en-US" sz="730" dirty="0">
+          <p:cNvPr id="65" name="Text 63"/>
+          <p:cNvSpPr/>
+          <p:nvPr/>
+        </p:nvSpPr>
+        <p:spPr>
+          <a:xfrm>
+            <a:off x="7560945" y="3086100"/>
+            <a:ext cx="1329309" cy="118872"/>
+          </a:xfrm>
+          <a:prstGeom prst="rect">
+            <a:avLst/>
+          </a:prstGeom>
+          <a:noFill/>
+          <a:ln/>
+        </p:spPr>
+        <p:txBody>
+          <a:bodyPr wrap="square" lIns="0" tIns="0" rIns="0" bIns="0" rtlCol="0" anchor="ctr"/>
+          <a:lstStyle/>
+          <a:p>
+            <a:pPr algn="ctr" indent="0" marL="0">
+              <a:buNone/>
+            </a:pPr>
+            <a:r>
+              <a:rPr lang="en-US" sz="700" dirty="0">
                 <a:solidFill>
                   <a:srgbClr val="98A2AC"/>
                 </a:solidFill>
@@ -3069,19 +3108,19 @@
               </a:rPr>
               <a:t>库位调整</a:t>
             </a:r>
-            <a:endParaRPr lang="en-US" sz="730" dirty="0"/>
-          </a:p>
-        </p:txBody>
-      </p:sp>
-      <p:sp>
-        <p:nvSpPr>
-          <p:cNvPr id="65" name="Shape 63"/>
-          <p:cNvSpPr/>
-          <p:nvPr/>
-        </p:nvSpPr>
-        <p:spPr>
-          <a:xfrm>
-            <a:off x="8981694" y="2999232"/>
+            <a:endParaRPr lang="en-US" sz="700" dirty="0"/>
+          </a:p>
+        </p:txBody>
+      </p:sp>
+      <p:sp>
+        <p:nvSpPr>
+          <p:cNvPr id="66" name="Shape 64"/>
+          <p:cNvSpPr/>
+          <p:nvPr/>
+        </p:nvSpPr>
+        <p:spPr>
+          <a:xfrm>
+            <a:off x="8981694" y="2926080"/>
             <a:ext cx="1329309" cy="310896"/>
           </a:xfrm>
           <a:prstGeom prst="roundRect">
@@ -3102,14 +3141,14 @@
       </p:sp>
       <p:sp>
         <p:nvSpPr>
-          <p:cNvPr id="66" name="Text 64"/>
-          <p:cNvSpPr/>
-          <p:nvPr/>
-        </p:nvSpPr>
-        <p:spPr>
-          <a:xfrm>
-            <a:off x="8981694" y="3044952"/>
-            <a:ext cx="1329309" cy="182880"/>
+          <p:cNvPr id="67" name="Text 65"/>
+          <p:cNvSpPr/>
+          <p:nvPr/>
+        </p:nvSpPr>
+        <p:spPr>
+          <a:xfrm>
+            <a:off x="8981694" y="2967228"/>
+            <a:ext cx="1329309" cy="141732"/>
           </a:xfrm>
           <a:prstGeom prst="rect">
             <a:avLst/>
@@ -3141,30 +3180,30 @@
       </p:sp>
       <p:sp>
         <p:nvSpPr>
-          <p:cNvPr id="67" name="Text 65"/>
-          <p:cNvSpPr/>
-          <p:nvPr/>
-        </p:nvSpPr>
-        <p:spPr>
-          <a:xfrm>
-            <a:off x="8981694" y="3118104"/>
-            <a:ext cx="1329309" cy="155448"/>
-          </a:xfrm>
-          <a:prstGeom prst="rect">
-            <a:avLst/>
-          </a:prstGeom>
-          <a:noFill/>
-          <a:ln/>
-        </p:spPr>
-        <p:txBody>
-          <a:bodyPr wrap="square" lIns="0" tIns="0" rIns="0" bIns="0" rtlCol="0" anchor="ctr"/>
-          <a:lstStyle/>
-          <a:p>
-            <a:pPr algn="ctr" indent="0" marL="0">
-              <a:buNone/>
-            </a:pPr>
-            <a:r>
-              <a:rPr lang="en-US" sz="730" dirty="0">
+          <p:cNvPr id="68" name="Text 66"/>
+          <p:cNvSpPr/>
+          <p:nvPr/>
+        </p:nvSpPr>
+        <p:spPr>
+          <a:xfrm>
+            <a:off x="8981694" y="3086100"/>
+            <a:ext cx="1329309" cy="118872"/>
+          </a:xfrm>
+          <a:prstGeom prst="rect">
+            <a:avLst/>
+          </a:prstGeom>
+          <a:noFill/>
+          <a:ln/>
+        </p:spPr>
+        <p:txBody>
+          <a:bodyPr wrap="square" lIns="0" tIns="0" rIns="0" bIns="0" rtlCol="0" anchor="ctr"/>
+          <a:lstStyle/>
+          <a:p>
+            <a:pPr algn="ctr" indent="0" marL="0">
+              <a:buNone/>
+            </a:pPr>
+            <a:r>
+              <a:rPr lang="en-US" sz="700" dirty="0">
                 <a:solidFill>
                   <a:srgbClr val="98A2AC"/>
                 </a:solidFill>
@@ -3174,19 +3213,19 @@
               </a:rPr>
               <a:t>锁号·产能</a:t>
             </a:r>
-            <a:endParaRPr lang="en-US" sz="730" dirty="0"/>
-          </a:p>
-        </p:txBody>
-      </p:sp>
-      <p:sp>
-        <p:nvSpPr>
-          <p:cNvPr id="68" name="Shape 66"/>
-          <p:cNvSpPr/>
-          <p:nvPr/>
-        </p:nvSpPr>
-        <p:spPr>
-          <a:xfrm>
-            <a:off x="10402443" y="2999232"/>
+            <a:endParaRPr lang="en-US" sz="700" dirty="0"/>
+          </a:p>
+        </p:txBody>
+      </p:sp>
+      <p:sp>
+        <p:nvSpPr>
+          <p:cNvPr id="69" name="Shape 67"/>
+          <p:cNvSpPr/>
+          <p:nvPr/>
+        </p:nvSpPr>
+        <p:spPr>
+          <a:xfrm>
+            <a:off x="10402443" y="2926080"/>
             <a:ext cx="1329309" cy="310896"/>
           </a:xfrm>
           <a:prstGeom prst="roundRect">
@@ -3207,14 +3246,14 @@
       </p:sp>
       <p:sp>
         <p:nvSpPr>
-          <p:cNvPr id="69" name="Text 67"/>
-          <p:cNvSpPr/>
-          <p:nvPr/>
-        </p:nvSpPr>
-        <p:spPr>
-          <a:xfrm>
-            <a:off x="10402443" y="3044952"/>
-            <a:ext cx="1329309" cy="182880"/>
+          <p:cNvPr id="70" name="Text 68"/>
+          <p:cNvSpPr/>
+          <p:nvPr/>
+        </p:nvSpPr>
+        <p:spPr>
+          <a:xfrm>
+            <a:off x="10402443" y="2967228"/>
+            <a:ext cx="1329309" cy="141732"/>
           </a:xfrm>
           <a:prstGeom prst="rect">
             <a:avLst/>
@@ -3246,30 +3285,30 @@
       </p:sp>
       <p:sp>
         <p:nvSpPr>
-          <p:cNvPr id="70" name="Text 68"/>
-          <p:cNvSpPr/>
-          <p:nvPr/>
-        </p:nvSpPr>
-        <p:spPr>
-          <a:xfrm>
-            <a:off x="10402443" y="3118104"/>
-            <a:ext cx="1329309" cy="155448"/>
-          </a:xfrm>
-          <a:prstGeom prst="rect">
-            <a:avLst/>
-          </a:prstGeom>
-          <a:noFill/>
-          <a:ln/>
-        </p:spPr>
-        <p:txBody>
-          <a:bodyPr wrap="square" lIns="0" tIns="0" rIns="0" bIns="0" rtlCol="0" anchor="ctr"/>
-          <a:lstStyle/>
-          <a:p>
-            <a:pPr algn="ctr" indent="0" marL="0">
-              <a:buNone/>
-            </a:pPr>
-            <a:r>
-              <a:rPr lang="en-US" sz="730" dirty="0">
+          <p:cNvPr id="71" name="Text 69"/>
+          <p:cNvSpPr/>
+          <p:nvPr/>
+        </p:nvSpPr>
+        <p:spPr>
+          <a:xfrm>
+            <a:off x="10402443" y="3086100"/>
+            <a:ext cx="1329309" cy="118872"/>
+          </a:xfrm>
+          <a:prstGeom prst="rect">
+            <a:avLst/>
+          </a:prstGeom>
+          <a:noFill/>
+          <a:ln/>
+        </p:spPr>
+        <p:txBody>
+          <a:bodyPr wrap="square" lIns="0" tIns="0" rIns="0" bIns="0" rtlCol="0" anchor="ctr"/>
+          <a:lstStyle/>
+          <a:p>
+            <a:pPr algn="ctr" indent="0" marL="0">
+              <a:buNone/>
+            </a:pPr>
+            <a:r>
+              <a:rPr lang="en-US" sz="700" dirty="0">
                 <a:solidFill>
                   <a:srgbClr val="98A2AC"/>
                 </a:solidFill>
@@ -3279,19 +3318,19 @@
               </a:rPr>
               <a:t>库存核对</a:t>
             </a:r>
-            <a:endParaRPr lang="en-US" sz="730" dirty="0"/>
-          </a:p>
-        </p:txBody>
-      </p:sp>
-      <p:sp>
-        <p:nvSpPr>
-          <p:cNvPr id="71" name="Text 69"/>
-          <p:cNvSpPr/>
-          <p:nvPr/>
-        </p:nvSpPr>
-        <p:spPr>
-          <a:xfrm>
-            <a:off x="457200" y="3364992"/>
+            <a:endParaRPr lang="en-US" sz="700" dirty="0"/>
+          </a:p>
+        </p:txBody>
+      </p:sp>
+      <p:sp>
+        <p:nvSpPr>
+          <p:cNvPr id="72" name="Text 70"/>
+          <p:cNvSpPr/>
+          <p:nvPr/>
+        </p:nvSpPr>
+        <p:spPr>
+          <a:xfrm>
+            <a:off x="457200" y="3273552"/>
             <a:ext cx="5486400" cy="164592"/>
           </a:xfrm>
           <a:prstGeom prst="rect">
@@ -3338,13 +3377,13 @@
       </p:sp>
       <p:sp>
         <p:nvSpPr>
-          <p:cNvPr id="72" name="Text 70"/>
-          <p:cNvSpPr/>
-          <p:nvPr/>
-        </p:nvSpPr>
-        <p:spPr>
-          <a:xfrm>
-            <a:off x="8805672" y="3364992"/>
+          <p:cNvPr id="73" name="Text 71"/>
+          <p:cNvSpPr/>
+          <p:nvPr/>
+        </p:nvSpPr>
+        <p:spPr>
+          <a:xfrm>
+            <a:off x="8805672" y="3273552"/>
             <a:ext cx="2926080" cy="164592"/>
           </a:xfrm>
           <a:prstGeom prst="rect">
@@ -3377,18 +3416,18 @@
       </p:sp>
       <p:sp>
         <p:nvSpPr>
-          <p:cNvPr id="73" name="Shape 71"/>
-          <p:cNvSpPr/>
-          <p:nvPr/>
-        </p:nvSpPr>
-        <p:spPr>
-          <a:xfrm>
-            <a:off x="457200" y="3529584"/>
-            <a:ext cx="2181758" cy="365760"/>
+          <p:cNvPr id="74" name="Shape 72"/>
+          <p:cNvSpPr/>
+          <p:nvPr/>
+        </p:nvSpPr>
+        <p:spPr>
+          <a:xfrm>
+            <a:off x="457200" y="3419856"/>
+            <a:ext cx="2181758" cy="310896"/>
           </a:xfrm>
           <a:prstGeom prst="roundRect">
             <a:avLst>
-              <a:gd name="adj" fmla="val 7500"/>
+              <a:gd name="adj" fmla="val 8824"/>
             </a:avLst>
           </a:prstGeom>
           <a:solidFill>
@@ -3404,30 +3443,30 @@
       </p:sp>
       <p:sp>
         <p:nvSpPr>
-          <p:cNvPr id="74" name="Text 72"/>
-          <p:cNvSpPr/>
-          <p:nvPr/>
-        </p:nvSpPr>
-        <p:spPr>
-          <a:xfrm>
-            <a:off x="457200" y="3575304"/>
-            <a:ext cx="2181758" cy="182880"/>
-          </a:xfrm>
-          <a:prstGeom prst="rect">
-            <a:avLst/>
-          </a:prstGeom>
-          <a:noFill/>
-          <a:ln/>
-        </p:spPr>
-        <p:txBody>
-          <a:bodyPr wrap="square" lIns="0" tIns="0" rIns="0" bIns="0" rtlCol="0" anchor="ctr"/>
-          <a:lstStyle/>
-          <a:p>
-            <a:pPr algn="ctr" indent="0" marL="0">
-              <a:buNone/>
-            </a:pPr>
-            <a:r>
-              <a:rPr lang="en-US" sz="950" b="1" dirty="0">
+          <p:cNvPr id="75" name="Text 73"/>
+          <p:cNvSpPr/>
+          <p:nvPr/>
+        </p:nvSpPr>
+        <p:spPr>
+          <a:xfrm>
+            <a:off x="457200" y="3461004"/>
+            <a:ext cx="2181758" cy="141732"/>
+          </a:xfrm>
+          <a:prstGeom prst="rect">
+            <a:avLst/>
+          </a:prstGeom>
+          <a:noFill/>
+          <a:ln/>
+        </p:spPr>
+        <p:txBody>
+          <a:bodyPr wrap="square" lIns="0" tIns="0" rIns="0" bIns="0" rtlCol="0" anchor="ctr"/>
+          <a:lstStyle/>
+          <a:p>
+            <a:pPr algn="ctr" indent="0" marL="0">
+              <a:buNone/>
+            </a:pPr>
+            <a:r>
+              <a:rPr lang="en-US" sz="900" b="1" dirty="0">
                 <a:solidFill>
                   <a:srgbClr val="98A2AC"/>
                 </a:solidFill>
@@ -3437,36 +3476,36 @@
               </a:rPr>
               <a:t>货架到人适配</a:t>
             </a:r>
-            <a:endParaRPr lang="en-US" sz="950" dirty="0"/>
-          </a:p>
-        </p:txBody>
-      </p:sp>
-      <p:sp>
-        <p:nvSpPr>
-          <p:cNvPr id="75" name="Text 73"/>
-          <p:cNvSpPr/>
-          <p:nvPr/>
-        </p:nvSpPr>
-        <p:spPr>
-          <a:xfrm>
-            <a:off x="457200" y="3703320"/>
-            <a:ext cx="2181758" cy="155448"/>
-          </a:xfrm>
-          <a:prstGeom prst="rect">
-            <a:avLst/>
-          </a:prstGeom>
-          <a:noFill/>
-          <a:ln/>
-        </p:spPr>
-        <p:txBody>
-          <a:bodyPr wrap="square" lIns="0" tIns="0" rIns="0" bIns="0" rtlCol="0" anchor="ctr"/>
-          <a:lstStyle/>
-          <a:p>
-            <a:pPr algn="ctr" indent="0" marL="0">
-              <a:buNone/>
-            </a:pPr>
-            <a:r>
-              <a:rPr lang="en-US" sz="730" dirty="0">
+            <a:endParaRPr lang="en-US" sz="900" dirty="0"/>
+          </a:p>
+        </p:txBody>
+      </p:sp>
+      <p:sp>
+        <p:nvSpPr>
+          <p:cNvPr id="76" name="Text 74"/>
+          <p:cNvSpPr/>
+          <p:nvPr/>
+        </p:nvSpPr>
+        <p:spPr>
+          <a:xfrm>
+            <a:off x="457200" y="3579876"/>
+            <a:ext cx="2181758" cy="118872"/>
+          </a:xfrm>
+          <a:prstGeom prst="rect">
+            <a:avLst/>
+          </a:prstGeom>
+          <a:noFill/>
+          <a:ln/>
+        </p:spPr>
+        <p:txBody>
+          <a:bodyPr wrap="square" lIns="0" tIns="0" rIns="0" bIns="0" rtlCol="0" anchor="ctr"/>
+          <a:lstStyle/>
+          <a:p>
+            <a:pPr algn="ctr" indent="0" marL="0">
+              <a:buNone/>
+            </a:pPr>
+            <a:r>
+              <a:rPr lang="en-US" sz="700" dirty="0">
                 <a:solidFill>
                   <a:srgbClr val="98A2AC"/>
                 </a:solidFill>
@@ -3476,24 +3515,24 @@
               </a:rPr>
               <a:t>PopPick 类</a:t>
             </a:r>
-            <a:endParaRPr lang="en-US" sz="730" dirty="0"/>
-          </a:p>
-        </p:txBody>
-      </p:sp>
-      <p:sp>
-        <p:nvSpPr>
-          <p:cNvPr id="76" name="Shape 74"/>
-          <p:cNvSpPr/>
-          <p:nvPr/>
-        </p:nvSpPr>
-        <p:spPr>
-          <a:xfrm>
-            <a:off x="2730398" y="3529584"/>
-            <a:ext cx="2181758" cy="365760"/>
+            <a:endParaRPr lang="en-US" sz="700" dirty="0"/>
+          </a:p>
+        </p:txBody>
+      </p:sp>
+      <p:sp>
+        <p:nvSpPr>
+          <p:cNvPr id="77" name="Shape 75"/>
+          <p:cNvSpPr/>
+          <p:nvPr/>
+        </p:nvSpPr>
+        <p:spPr>
+          <a:xfrm>
+            <a:off x="2730398" y="3419856"/>
+            <a:ext cx="2181758" cy="310896"/>
           </a:xfrm>
           <a:prstGeom prst="roundRect">
             <a:avLst>
-              <a:gd name="adj" fmla="val 7500"/>
+              <a:gd name="adj" fmla="val 8824"/>
             </a:avLst>
           </a:prstGeom>
           <a:solidFill>
@@ -3509,30 +3548,30 @@
       </p:sp>
       <p:sp>
         <p:nvSpPr>
-          <p:cNvPr id="77" name="Text 75"/>
-          <p:cNvSpPr/>
-          <p:nvPr/>
-        </p:nvSpPr>
-        <p:spPr>
-          <a:xfrm>
-            <a:off x="2730398" y="3575304"/>
-            <a:ext cx="2181758" cy="182880"/>
-          </a:xfrm>
-          <a:prstGeom prst="rect">
-            <a:avLst/>
-          </a:prstGeom>
-          <a:noFill/>
-          <a:ln/>
-        </p:spPr>
-        <p:txBody>
-          <a:bodyPr wrap="square" lIns="0" tIns="0" rIns="0" bIns="0" rtlCol="0" anchor="ctr"/>
-          <a:lstStyle/>
-          <a:p>
-            <a:pPr algn="ctr" indent="0" marL="0">
-              <a:buNone/>
-            </a:pPr>
-            <a:r>
-              <a:rPr lang="en-US" sz="950" b="1" dirty="0">
+          <p:cNvPr id="78" name="Text 76"/>
+          <p:cNvSpPr/>
+          <p:nvPr/>
+        </p:nvSpPr>
+        <p:spPr>
+          <a:xfrm>
+            <a:off x="2730398" y="3461004"/>
+            <a:ext cx="2181758" cy="141732"/>
+          </a:xfrm>
+          <a:prstGeom prst="rect">
+            <a:avLst/>
+          </a:prstGeom>
+          <a:noFill/>
+          <a:ln/>
+        </p:spPr>
+        <p:txBody>
+          <a:bodyPr wrap="square" lIns="0" tIns="0" rIns="0" bIns="0" rtlCol="0" anchor="ctr"/>
+          <a:lstStyle/>
+          <a:p>
+            <a:pPr algn="ctr" indent="0" marL="0">
+              <a:buNone/>
+            </a:pPr>
+            <a:r>
+              <a:rPr lang="en-US" sz="900" b="1" dirty="0">
                 <a:solidFill>
                   <a:srgbClr val="D7382E"/>
                 </a:solidFill>
@@ -3542,36 +3581,36 @@
               </a:rPr>
               <a:t>料箱到人适配</a:t>
             </a:r>
-            <a:endParaRPr lang="en-US" sz="950" dirty="0"/>
-          </a:p>
-        </p:txBody>
-      </p:sp>
-      <p:sp>
-        <p:nvSpPr>
-          <p:cNvPr id="78" name="Text 76"/>
-          <p:cNvSpPr/>
-          <p:nvPr/>
-        </p:nvSpPr>
-        <p:spPr>
-          <a:xfrm>
-            <a:off x="2730398" y="3703320"/>
-            <a:ext cx="2181758" cy="155448"/>
-          </a:xfrm>
-          <a:prstGeom prst="rect">
-            <a:avLst/>
-          </a:prstGeom>
-          <a:noFill/>
-          <a:ln/>
-        </p:spPr>
-        <p:txBody>
-          <a:bodyPr wrap="square" lIns="0" tIns="0" rIns="0" bIns="0" rtlCol="0" anchor="ctr"/>
-          <a:lstStyle/>
-          <a:p>
-            <a:pPr algn="ctr" indent="0" marL="0">
-              <a:buNone/>
-            </a:pPr>
-            <a:r>
-              <a:rPr lang="en-US" sz="730" dirty="0">
+            <a:endParaRPr lang="en-US" sz="900" dirty="0"/>
+          </a:p>
+        </p:txBody>
+      </p:sp>
+      <p:sp>
+        <p:nvSpPr>
+          <p:cNvPr id="79" name="Text 77"/>
+          <p:cNvSpPr/>
+          <p:nvPr/>
+        </p:nvSpPr>
+        <p:spPr>
+          <a:xfrm>
+            <a:off x="2730398" y="3579876"/>
+            <a:ext cx="2181758" cy="118872"/>
+          </a:xfrm>
+          <a:prstGeom prst="rect">
+            <a:avLst/>
+          </a:prstGeom>
+          <a:noFill/>
+          <a:ln/>
+        </p:spPr>
+        <p:txBody>
+          <a:bodyPr wrap="square" lIns="0" tIns="0" rIns="0" bIns="0" rtlCol="0" anchor="ctr"/>
+          <a:lstStyle/>
+          <a:p>
+            <a:pPr algn="ctr" indent="0" marL="0">
+              <a:buNone/>
+            </a:pPr>
+            <a:r>
+              <a:rPr lang="en-US" sz="700" dirty="0">
                 <a:solidFill>
                   <a:srgbClr val="D7382E"/>
                 </a:solidFill>
@@ -3581,24 +3620,24 @@
               </a:rPr>
               <a:t>Shuttle 类 · 闪攀</a:t>
             </a:r>
-            <a:endParaRPr lang="en-US" sz="730" dirty="0"/>
-          </a:p>
-        </p:txBody>
-      </p:sp>
-      <p:sp>
-        <p:nvSpPr>
-          <p:cNvPr id="79" name="Shape 77"/>
-          <p:cNvSpPr/>
-          <p:nvPr/>
-        </p:nvSpPr>
-        <p:spPr>
-          <a:xfrm>
-            <a:off x="5003597" y="3529584"/>
-            <a:ext cx="2181758" cy="365760"/>
+            <a:endParaRPr lang="en-US" sz="700" dirty="0"/>
+          </a:p>
+        </p:txBody>
+      </p:sp>
+      <p:sp>
+        <p:nvSpPr>
+          <p:cNvPr id="80" name="Shape 78"/>
+          <p:cNvSpPr/>
+          <p:nvPr/>
+        </p:nvSpPr>
+        <p:spPr>
+          <a:xfrm>
+            <a:off x="5003597" y="3419856"/>
+            <a:ext cx="2181758" cy="310896"/>
           </a:xfrm>
           <a:prstGeom prst="roundRect">
             <a:avLst>
-              <a:gd name="adj" fmla="val 7500"/>
+              <a:gd name="adj" fmla="val 8824"/>
             </a:avLst>
           </a:prstGeom>
           <a:solidFill>
@@ -3614,30 +3653,30 @@
       </p:sp>
       <p:sp>
         <p:nvSpPr>
-          <p:cNvPr id="80" name="Text 78"/>
-          <p:cNvSpPr/>
-          <p:nvPr/>
-        </p:nvSpPr>
-        <p:spPr>
-          <a:xfrm>
-            <a:off x="5003597" y="3575304"/>
-            <a:ext cx="2181758" cy="182880"/>
-          </a:xfrm>
-          <a:prstGeom prst="rect">
-            <a:avLst/>
-          </a:prstGeom>
-          <a:noFill/>
-          <a:ln/>
-        </p:spPr>
-        <p:txBody>
-          <a:bodyPr wrap="square" lIns="0" tIns="0" rIns="0" bIns="0" rtlCol="0" anchor="ctr"/>
-          <a:lstStyle/>
-          <a:p>
-            <a:pPr algn="ctr" indent="0" marL="0">
-              <a:buNone/>
-            </a:pPr>
-            <a:r>
-              <a:rPr lang="en-US" sz="950" b="1" dirty="0">
+          <p:cNvPr id="81" name="Text 79"/>
+          <p:cNvSpPr/>
+          <p:nvPr/>
+        </p:nvSpPr>
+        <p:spPr>
+          <a:xfrm>
+            <a:off x="5003597" y="3461004"/>
+            <a:ext cx="2181758" cy="141732"/>
+          </a:xfrm>
+          <a:prstGeom prst="rect">
+            <a:avLst/>
+          </a:prstGeom>
+          <a:noFill/>
+          <a:ln/>
+        </p:spPr>
+        <p:txBody>
+          <a:bodyPr wrap="square" lIns="0" tIns="0" rIns="0" bIns="0" rtlCol="0" anchor="ctr"/>
+          <a:lstStyle/>
+          <a:p>
+            <a:pPr algn="ctr" indent="0" marL="0">
+              <a:buNone/>
+            </a:pPr>
+            <a:r>
+              <a:rPr lang="en-US" sz="900" b="1" dirty="0">
                 <a:solidFill>
                   <a:srgbClr val="98A2AC"/>
                 </a:solidFill>
@@ -3647,36 +3686,36 @@
               </a:rPr>
               <a:t>托盘到人适配</a:t>
             </a:r>
-            <a:endParaRPr lang="en-US" sz="950" dirty="0"/>
-          </a:p>
-        </p:txBody>
-      </p:sp>
-      <p:sp>
-        <p:nvSpPr>
-          <p:cNvPr id="81" name="Text 79"/>
-          <p:cNvSpPr/>
-          <p:nvPr/>
-        </p:nvSpPr>
-        <p:spPr>
-          <a:xfrm>
-            <a:off x="5003597" y="3703320"/>
-            <a:ext cx="2181758" cy="155448"/>
-          </a:xfrm>
-          <a:prstGeom prst="rect">
-            <a:avLst/>
-          </a:prstGeom>
-          <a:noFill/>
-          <a:ln/>
-        </p:spPr>
-        <p:txBody>
-          <a:bodyPr wrap="square" lIns="0" tIns="0" rIns="0" bIns="0" rtlCol="0" anchor="ctr"/>
-          <a:lstStyle/>
-          <a:p>
-            <a:pPr algn="ctr" indent="0" marL="0">
-              <a:buNone/>
-            </a:pPr>
-            <a:r>
-              <a:rPr lang="en-US" sz="730" dirty="0">
+            <a:endParaRPr lang="en-US" sz="900" dirty="0"/>
+          </a:p>
+        </p:txBody>
+      </p:sp>
+      <p:sp>
+        <p:nvSpPr>
+          <p:cNvPr id="82" name="Text 80"/>
+          <p:cNvSpPr/>
+          <p:nvPr/>
+        </p:nvSpPr>
+        <p:spPr>
+          <a:xfrm>
+            <a:off x="5003597" y="3579876"/>
+            <a:ext cx="2181758" cy="118872"/>
+          </a:xfrm>
+          <a:prstGeom prst="rect">
+            <a:avLst/>
+          </a:prstGeom>
+          <a:noFill/>
+          <a:ln/>
+        </p:spPr>
+        <p:txBody>
+          <a:bodyPr wrap="square" lIns="0" tIns="0" rIns="0" bIns="0" rtlCol="0" anchor="ctr"/>
+          <a:lstStyle/>
+          <a:p>
+            <a:pPr algn="ctr" indent="0" marL="0">
+              <a:buNone/>
+            </a:pPr>
+            <a:r>
+              <a:rPr lang="en-US" sz="700" dirty="0">
                 <a:solidFill>
                   <a:srgbClr val="98A2AC"/>
                 </a:solidFill>
@@ -3686,24 +3725,24 @@
               </a:rPr>
               <a:t>高位密存类</a:t>
             </a:r>
-            <a:endParaRPr lang="en-US" sz="730" dirty="0"/>
-          </a:p>
-        </p:txBody>
-      </p:sp>
-      <p:sp>
-        <p:nvSpPr>
-          <p:cNvPr id="82" name="Shape 80"/>
-          <p:cNvSpPr/>
-          <p:nvPr/>
-        </p:nvSpPr>
-        <p:spPr>
-          <a:xfrm>
-            <a:off x="7276795" y="3529584"/>
-            <a:ext cx="2181758" cy="365760"/>
+            <a:endParaRPr lang="en-US" sz="700" dirty="0"/>
+          </a:p>
+        </p:txBody>
+      </p:sp>
+      <p:sp>
+        <p:nvSpPr>
+          <p:cNvPr id="83" name="Shape 81"/>
+          <p:cNvSpPr/>
+          <p:nvPr/>
+        </p:nvSpPr>
+        <p:spPr>
+          <a:xfrm>
+            <a:off x="7276795" y="3419856"/>
+            <a:ext cx="2181758" cy="310896"/>
           </a:xfrm>
           <a:prstGeom prst="roundRect">
             <a:avLst>
-              <a:gd name="adj" fmla="val 7500"/>
+              <a:gd name="adj" fmla="val 8824"/>
             </a:avLst>
           </a:prstGeom>
           <a:solidFill>
@@ -3719,30 +3758,30 @@
       </p:sp>
       <p:sp>
         <p:nvSpPr>
-          <p:cNvPr id="83" name="Text 81"/>
-          <p:cNvSpPr/>
-          <p:nvPr/>
-        </p:nvSpPr>
-        <p:spPr>
-          <a:xfrm>
-            <a:off x="7276795" y="3575304"/>
-            <a:ext cx="2181758" cy="182880"/>
-          </a:xfrm>
-          <a:prstGeom prst="rect">
-            <a:avLst/>
-          </a:prstGeom>
-          <a:noFill/>
-          <a:ln/>
-        </p:spPr>
-        <p:txBody>
-          <a:bodyPr wrap="square" lIns="0" tIns="0" rIns="0" bIns="0" rtlCol="0" anchor="ctr"/>
-          <a:lstStyle/>
-          <a:p>
-            <a:pPr algn="ctr" indent="0" marL="0">
-              <a:buNone/>
-            </a:pPr>
-            <a:r>
-              <a:rPr lang="en-US" sz="950" b="1" dirty="0">
+          <p:cNvPr id="84" name="Text 82"/>
+          <p:cNvSpPr/>
+          <p:nvPr/>
+        </p:nvSpPr>
+        <p:spPr>
+          <a:xfrm>
+            <a:off x="7276795" y="3461004"/>
+            <a:ext cx="2181758" cy="141732"/>
+          </a:xfrm>
+          <a:prstGeom prst="rect">
+            <a:avLst/>
+          </a:prstGeom>
+          <a:noFill/>
+          <a:ln/>
+        </p:spPr>
+        <p:txBody>
+          <a:bodyPr wrap="square" lIns="0" tIns="0" rIns="0" bIns="0" rtlCol="0" anchor="ctr"/>
+          <a:lstStyle/>
+          <a:p>
+            <a:pPr algn="ctr" indent="0" marL="0">
+              <a:buNone/>
+            </a:pPr>
+            <a:r>
+              <a:rPr lang="en-US" sz="900" b="1" dirty="0">
                 <a:solidFill>
                   <a:srgbClr val="98A2AC"/>
                 </a:solidFill>
@@ -3752,36 +3791,36 @@
               </a:rPr>
               <a:t>分拣机器人适配</a:t>
             </a:r>
-            <a:endParaRPr lang="en-US" sz="950" dirty="0"/>
-          </a:p>
-        </p:txBody>
-      </p:sp>
-      <p:sp>
-        <p:nvSpPr>
-          <p:cNvPr id="84" name="Text 82"/>
-          <p:cNvSpPr/>
-          <p:nvPr/>
-        </p:nvSpPr>
-        <p:spPr>
-          <a:xfrm>
-            <a:off x="7276795" y="3703320"/>
-            <a:ext cx="2181758" cy="155448"/>
-          </a:xfrm>
-          <a:prstGeom prst="rect">
-            <a:avLst/>
-          </a:prstGeom>
-          <a:noFill/>
-          <a:ln/>
-        </p:spPr>
-        <p:txBody>
-          <a:bodyPr wrap="square" lIns="0" tIns="0" rIns="0" bIns="0" rtlCol="0" anchor="ctr"/>
-          <a:lstStyle/>
-          <a:p>
-            <a:pPr algn="ctr" indent="0" marL="0">
-              <a:buNone/>
-            </a:pPr>
-            <a:r>
-              <a:rPr lang="en-US" sz="730" dirty="0">
+            <a:endParaRPr lang="en-US" sz="900" dirty="0"/>
+          </a:p>
+        </p:txBody>
+      </p:sp>
+      <p:sp>
+        <p:nvSpPr>
+          <p:cNvPr id="85" name="Text 83"/>
+          <p:cNvSpPr/>
+          <p:nvPr/>
+        </p:nvSpPr>
+        <p:spPr>
+          <a:xfrm>
+            <a:off x="7276795" y="3579876"/>
+            <a:ext cx="2181758" cy="118872"/>
+          </a:xfrm>
+          <a:prstGeom prst="rect">
+            <a:avLst/>
+          </a:prstGeom>
+          <a:noFill/>
+          <a:ln/>
+        </p:spPr>
+        <p:txBody>
+          <a:bodyPr wrap="square" lIns="0" tIns="0" rIns="0" bIns="0" rtlCol="0" anchor="ctr"/>
+          <a:lstStyle/>
+          <a:p>
+            <a:pPr algn="ctr" indent="0" marL="0">
+              <a:buNone/>
+            </a:pPr>
+            <a:r>
+              <a:rPr lang="en-US" sz="700" dirty="0">
                 <a:solidFill>
                   <a:srgbClr val="98A2AC"/>
                 </a:solidFill>
@@ -3791,24 +3830,24 @@
               </a:rPr>
               <a:t>柔性分拣类</a:t>
             </a:r>
-            <a:endParaRPr lang="en-US" sz="730" dirty="0"/>
-          </a:p>
-        </p:txBody>
-      </p:sp>
-      <p:sp>
-        <p:nvSpPr>
-          <p:cNvPr id="85" name="Shape 83"/>
-          <p:cNvSpPr/>
-          <p:nvPr/>
-        </p:nvSpPr>
-        <p:spPr>
-          <a:xfrm>
-            <a:off x="9549994" y="3529584"/>
-            <a:ext cx="2181758" cy="365760"/>
+            <a:endParaRPr lang="en-US" sz="700" dirty="0"/>
+          </a:p>
+        </p:txBody>
+      </p:sp>
+      <p:sp>
+        <p:nvSpPr>
+          <p:cNvPr id="86" name="Shape 84"/>
+          <p:cNvSpPr/>
+          <p:nvPr/>
+        </p:nvSpPr>
+        <p:spPr>
+          <a:xfrm>
+            <a:off x="9549994" y="3419856"/>
+            <a:ext cx="2181758" cy="310896"/>
           </a:xfrm>
           <a:prstGeom prst="roundRect">
             <a:avLst>
-              <a:gd name="adj" fmla="val 7500"/>
+              <a:gd name="adj" fmla="val 8824"/>
             </a:avLst>
           </a:prstGeom>
           <a:solidFill>
@@ -3824,30 +3863,30 @@
       </p:sp>
       <p:sp>
         <p:nvSpPr>
-          <p:cNvPr id="86" name="Text 84"/>
-          <p:cNvSpPr/>
-          <p:nvPr/>
-        </p:nvSpPr>
-        <p:spPr>
-          <a:xfrm>
-            <a:off x="9549994" y="3575304"/>
-            <a:ext cx="2181758" cy="182880"/>
-          </a:xfrm>
-          <a:prstGeom prst="rect">
-            <a:avLst/>
-          </a:prstGeom>
-          <a:noFill/>
-          <a:ln/>
-        </p:spPr>
-        <p:txBody>
-          <a:bodyPr wrap="square" lIns="0" tIns="0" rIns="0" bIns="0" rtlCol="0" anchor="ctr"/>
-          <a:lstStyle/>
-          <a:p>
-            <a:pPr algn="ctr" indent="0" marL="0">
-              <a:buNone/>
-            </a:pPr>
-            <a:r>
-              <a:rPr lang="en-US" sz="950" b="1" dirty="0">
+          <p:cNvPr id="87" name="Text 85"/>
+          <p:cNvSpPr/>
+          <p:nvPr/>
+        </p:nvSpPr>
+        <p:spPr>
+          <a:xfrm>
+            <a:off x="9549994" y="3461004"/>
+            <a:ext cx="2181758" cy="141732"/>
+          </a:xfrm>
+          <a:prstGeom prst="rect">
+            <a:avLst/>
+          </a:prstGeom>
+          <a:noFill/>
+          <a:ln/>
+        </p:spPr>
+        <p:txBody>
+          <a:bodyPr wrap="square" lIns="0" tIns="0" rIns="0" bIns="0" rtlCol="0" anchor="ctr"/>
+          <a:lstStyle/>
+          <a:p>
+            <a:pPr algn="ctr" indent="0" marL="0">
+              <a:buNone/>
+            </a:pPr>
+            <a:r>
+              <a:rPr lang="en-US" sz="900" b="1" dirty="0">
                 <a:solidFill>
                   <a:srgbClr val="98A2AC"/>
                 </a:solidFill>
@@ -3857,36 +3896,36 @@
               </a:rPr>
               <a:t>通用设备适配</a:t>
             </a:r>
-            <a:endParaRPr lang="en-US" sz="950" dirty="0"/>
-          </a:p>
-        </p:txBody>
-      </p:sp>
-      <p:sp>
-        <p:nvSpPr>
-          <p:cNvPr id="87" name="Text 85"/>
-          <p:cNvSpPr/>
-          <p:nvPr/>
-        </p:nvSpPr>
-        <p:spPr>
-          <a:xfrm>
-            <a:off x="9549994" y="3703320"/>
-            <a:ext cx="2181758" cy="155448"/>
-          </a:xfrm>
-          <a:prstGeom prst="rect">
-            <a:avLst/>
-          </a:prstGeom>
-          <a:noFill/>
-          <a:ln/>
-        </p:spPr>
-        <p:txBody>
-          <a:bodyPr wrap="square" lIns="0" tIns="0" rIns="0" bIns="0" rtlCol="0" anchor="ctr"/>
-          <a:lstStyle/>
-          <a:p>
-            <a:pPr algn="ctr" indent="0" marL="0">
-              <a:buNone/>
-            </a:pPr>
-            <a:r>
-              <a:rPr lang="en-US" sz="730" dirty="0">
+            <a:endParaRPr lang="en-US" sz="900" dirty="0"/>
+          </a:p>
+        </p:txBody>
+      </p:sp>
+      <p:sp>
+        <p:nvSpPr>
+          <p:cNvPr id="88" name="Text 86"/>
+          <p:cNvSpPr/>
+          <p:nvPr/>
+        </p:nvSpPr>
+        <p:spPr>
+          <a:xfrm>
+            <a:off x="9549994" y="3579876"/>
+            <a:ext cx="2181758" cy="118872"/>
+          </a:xfrm>
+          <a:prstGeom prst="rect">
+            <a:avLst/>
+          </a:prstGeom>
+          <a:noFill/>
+          <a:ln/>
+        </p:spPr>
+        <p:txBody>
+          <a:bodyPr wrap="square" lIns="0" tIns="0" rIns="0" bIns="0" rtlCol="0" anchor="ctr"/>
+          <a:lstStyle/>
+          <a:p>
+            <a:pPr algn="ctr" indent="0" marL="0">
+              <a:buNone/>
+            </a:pPr>
+            <a:r>
+              <a:rPr lang="en-US" sz="700" dirty="0">
                 <a:solidFill>
                   <a:srgbClr val="98A2AC"/>
                 </a:solidFill>
@@ -3896,36 +3935,36 @@
               </a:rPr>
               <a:t>AGV/RGV/输送线</a:t>
             </a:r>
-            <a:endParaRPr lang="en-US" sz="730" dirty="0"/>
-          </a:p>
-        </p:txBody>
-      </p:sp>
-      <p:sp>
-        <p:nvSpPr>
-          <p:cNvPr id="88" name="Text 86"/>
-          <p:cNvSpPr/>
-          <p:nvPr/>
-        </p:nvSpPr>
-        <p:spPr>
-          <a:xfrm>
-            <a:off x="2743200" y="4078224"/>
-            <a:ext cx="6675120" cy="128016"/>
-          </a:xfrm>
-          <a:prstGeom prst="rect">
-            <a:avLst/>
-          </a:prstGeom>
-          <a:noFill/>
-          <a:ln/>
-        </p:spPr>
-        <p:txBody>
-          <a:bodyPr wrap="square" lIns="0" tIns="0" rIns="0" bIns="0" rtlCol="0" anchor="ctr"/>
-          <a:lstStyle/>
-          <a:p>
-            <a:pPr algn="ctr" indent="0" marL="0">
-              <a:buNone/>
-            </a:pPr>
-            <a:r>
-              <a:rPr lang="en-US" sz="800" dirty="0">
+            <a:endParaRPr lang="en-US" sz="700" dirty="0"/>
+          </a:p>
+        </p:txBody>
+      </p:sp>
+      <p:sp>
+        <p:nvSpPr>
+          <p:cNvPr id="89" name="Text 87"/>
+          <p:cNvSpPr/>
+          <p:nvPr/>
+        </p:nvSpPr>
+        <p:spPr>
+          <a:xfrm>
+            <a:off x="2377440" y="3895344"/>
+            <a:ext cx="7406640" cy="128016"/>
+          </a:xfrm>
+          <a:prstGeom prst="rect">
+            <a:avLst/>
+          </a:prstGeom>
+          <a:noFill/>
+          <a:ln/>
+        </p:spPr>
+        <p:txBody>
+          <a:bodyPr wrap="square" lIns="0" tIns="0" rIns="0" bIns="0" rtlCol="0" anchor="ctr"/>
+          <a:lstStyle/>
+          <a:p>
+            <a:pPr algn="ctr" indent="0" marL="0">
+              <a:buNone/>
+            </a:pPr>
+            <a:r>
+              <a:rPr lang="en-US" sz="780" dirty="0">
                 <a:solidFill>
                   <a:srgbClr val="8A929B"/>
                 </a:solidFill>
@@ -3933,22 +3972,22 @@
                 <a:ea typeface="Microsoft YaHei" pitchFamily="34" charset="-122"/>
                 <a:cs typeface="Microsoft YaHei" pitchFamily="34" charset="-120"/>
               </a:rPr>
-              <a:t>经『料箱到人适配』下发标准指令 / 回传执行状态</a:t>
-            </a:r>
-            <a:endParaRPr lang="en-US" sz="800" dirty="0"/>
-          </a:p>
-        </p:txBody>
-      </p:sp>
-      <p:sp>
-        <p:nvSpPr>
-          <p:cNvPr id="89" name="Shape 87"/>
-          <p:cNvSpPr/>
-          <p:nvPr/>
-        </p:nvSpPr>
-        <p:spPr>
-          <a:xfrm>
-            <a:off x="2244852" y="4187952"/>
-            <a:ext cx="0" cy="100584"/>
+              <a:t>经『料箱到人适配』对接海柔 HAIQ · HTTP REST API（JSON/UTF-8 · 17 个接口）</a:t>
+            </a:r>
+            <a:endParaRPr lang="en-US" sz="780" dirty="0"/>
+          </a:p>
+        </p:txBody>
+      </p:sp>
+      <p:sp>
+        <p:nvSpPr>
+          <p:cNvPr id="90" name="Shape 88"/>
+          <p:cNvSpPr/>
+          <p:nvPr/>
+        </p:nvSpPr>
+        <p:spPr>
+          <a:xfrm>
+            <a:off x="2244852" y="4023360"/>
+            <a:ext cx="0" cy="73152"/>
           </a:xfrm>
           <a:prstGeom prst="line">
             <a:avLst/>
@@ -3966,14 +4005,14 @@
       </p:sp>
       <p:sp>
         <p:nvSpPr>
-          <p:cNvPr id="90" name="Shape 88"/>
-          <p:cNvSpPr/>
-          <p:nvPr/>
-        </p:nvSpPr>
-        <p:spPr>
-          <a:xfrm>
-            <a:off x="6094476" y="4187952"/>
-            <a:ext cx="0" cy="100584"/>
+          <p:cNvPr id="91" name="Shape 89"/>
+          <p:cNvSpPr/>
+          <p:nvPr/>
+        </p:nvSpPr>
+        <p:spPr>
+          <a:xfrm>
+            <a:off x="6094476" y="4023360"/>
+            <a:ext cx="0" cy="73152"/>
           </a:xfrm>
           <a:prstGeom prst="line">
             <a:avLst/>
@@ -3991,14 +4030,14 @@
       </p:sp>
       <p:sp>
         <p:nvSpPr>
-          <p:cNvPr id="91" name="Shape 89"/>
-          <p:cNvSpPr/>
-          <p:nvPr/>
-        </p:nvSpPr>
-        <p:spPr>
-          <a:xfrm>
-            <a:off x="9944100" y="4187952"/>
-            <a:ext cx="0" cy="100584"/>
+          <p:cNvPr id="92" name="Shape 90"/>
+          <p:cNvSpPr/>
+          <p:nvPr/>
+        </p:nvSpPr>
+        <p:spPr>
+          <a:xfrm>
+            <a:off x="9944100" y="4023360"/>
+            <a:ext cx="0" cy="73152"/>
           </a:xfrm>
           <a:prstGeom prst="line">
             <a:avLst/>
@@ -4016,18 +4055,18 @@
       </p:sp>
       <p:sp>
         <p:nvSpPr>
-          <p:cNvPr id="92" name="Shape 90"/>
-          <p:cNvSpPr/>
-          <p:nvPr/>
-        </p:nvSpPr>
-        <p:spPr>
-          <a:xfrm>
-            <a:off x="310896" y="4315968"/>
-            <a:ext cx="11567160" cy="1847088"/>
+          <p:cNvPr id="93" name="Shape 91"/>
+          <p:cNvSpPr/>
+          <p:nvPr/>
+        </p:nvSpPr>
+        <p:spPr>
+          <a:xfrm>
+            <a:off x="310896" y="4114800"/>
+            <a:ext cx="11567160" cy="2304288"/>
           </a:xfrm>
           <a:prstGeom prst="roundRect">
             <a:avLst>
-              <a:gd name="adj" fmla="val 2970"/>
+              <a:gd name="adj" fmla="val 2381"/>
             </a:avLst>
           </a:prstGeom>
           <a:solidFill>
@@ -4043,13 +4082,13 @@
       </p:sp>
       <p:sp>
         <p:nvSpPr>
-          <p:cNvPr id="93" name="Shape 91"/>
-          <p:cNvSpPr/>
-          <p:nvPr/>
-        </p:nvSpPr>
-        <p:spPr>
-          <a:xfrm>
-            <a:off x="457200" y="4389120"/>
+          <p:cNvPr id="94" name="Shape 92"/>
+          <p:cNvSpPr/>
+          <p:nvPr/>
+        </p:nvSpPr>
+        <p:spPr>
+          <a:xfrm>
+            <a:off x="457200" y="4169664"/>
             <a:ext cx="118872" cy="118872"/>
           </a:xfrm>
           <a:prstGeom prst="roundRect">
@@ -4065,14 +4104,14 @@
       </p:sp>
       <p:sp>
         <p:nvSpPr>
-          <p:cNvPr id="94" name="Text 92"/>
-          <p:cNvSpPr/>
-          <p:nvPr/>
-        </p:nvSpPr>
-        <p:spPr>
-          <a:xfrm>
-            <a:off x="658368" y="4361688"/>
-            <a:ext cx="8229600" cy="164592"/>
+          <p:cNvPr id="95" name="Text 93"/>
+          <p:cNvSpPr/>
+          <p:nvPr/>
+        </p:nvSpPr>
+        <p:spPr>
+          <a:xfrm>
+            <a:off x="658368" y="4142232"/>
+            <a:ext cx="8686800" cy="164592"/>
           </a:xfrm>
           <a:prstGeom prst="rect">
             <a:avLst/>
@@ -4096,7 +4135,7 @@
                 <a:ea typeface="Microsoft YaHei" pitchFamily="34" charset="-122"/>
                 <a:cs typeface="Microsoft YaHei" pitchFamily="34" charset="-120"/>
               </a:rPr>
-              <a:t>下游执行系统 · 海柔 闪攀</a:t>
+              <a:t>③ 执行系统层 · 海柔 HAIQ 智能仓储系统</a:t>
             </a:r>
             <a:pPr algn="l" indent="0" marL="0">
               <a:buNone/>
@@ -4110,7 +4149,7 @@
                 <a:ea typeface="Microsoft YaHei" pitchFamily="34" charset="-122"/>
                 <a:cs typeface="Microsoft YaHei" pitchFamily="34" charset="-120"/>
               </a:rPr>
-              <a:t>    WCS3 · 料箱到人</a:t>
+              <a:t>   WCS3 · 料箱到人 / 闪攀</a:t>
             </a:r>
             <a:endParaRPr lang="en-US" sz="950" dirty="0"/>
           </a:p>
@@ -4118,13 +4157,13 @@
       </p:sp>
       <p:sp>
         <p:nvSpPr>
-          <p:cNvPr id="95" name="Text 93"/>
-          <p:cNvSpPr/>
-          <p:nvPr/>
-        </p:nvSpPr>
-        <p:spPr>
-          <a:xfrm>
-            <a:off x="8622792" y="4361688"/>
+          <p:cNvPr id="96" name="Text 94"/>
+          <p:cNvSpPr/>
+          <p:nvPr/>
+        </p:nvSpPr>
+        <p:spPr>
+          <a:xfrm>
+            <a:off x="8622792" y="4142232"/>
             <a:ext cx="3108960" cy="164592"/>
           </a:xfrm>
           <a:prstGeom prst="rect">
@@ -4157,18 +4196,844 @@
       </p:sp>
       <p:sp>
         <p:nvSpPr>
-          <p:cNvPr id="96" name="Shape 94"/>
-          <p:cNvSpPr/>
-          <p:nvPr/>
-        </p:nvSpPr>
-        <p:spPr>
-          <a:xfrm>
-            <a:off x="457200" y="4553712"/>
-            <a:ext cx="3575304" cy="1481328"/>
+          <p:cNvPr id="97" name="Text 95"/>
+          <p:cNvSpPr/>
+          <p:nvPr/>
+        </p:nvSpPr>
+        <p:spPr>
+          <a:xfrm>
+            <a:off x="457200" y="4352544"/>
+            <a:ext cx="5486400" cy="146304"/>
+          </a:xfrm>
+          <a:prstGeom prst="rect">
+            <a:avLst/>
+          </a:prstGeom>
+          <a:noFill/>
+          <a:ln/>
+        </p:spPr>
+        <p:txBody>
+          <a:bodyPr wrap="square" lIns="0" tIns="0" rIns="0" bIns="0" rtlCol="0" anchor="ctr"/>
+          <a:lstStyle/>
+          <a:p>
+            <a:pPr algn="l" indent="0" marL="0">
+              <a:buNone/>
+            </a:pPr>
+            <a:r>
+              <a:rPr lang="en-US" sz="850" b="1" dirty="0">
+                <a:solidFill>
+                  <a:srgbClr val="27628D"/>
+                </a:solidFill>
+                <a:latin typeface="Microsoft YaHei" pitchFamily="34" charset="0"/>
+                <a:ea typeface="Microsoft YaHei" pitchFamily="34" charset="-122"/>
+                <a:cs typeface="Microsoft YaHei" pitchFamily="34" charset="-120"/>
+              </a:rPr>
+              <a:t>软件系统层 · 海柔 HAIQ</a:t>
+            </a:r>
+            <a:pPr algn="l" indent="0" marL="0">
+              <a:buNone/>
+            </a:pPr>
+            <a:r>
+              <a:rPr lang="en-US" sz="700" dirty="0">
+                <a:solidFill>
+                  <a:srgbClr val="8A929B"/>
+                </a:solidFill>
+                <a:latin typeface="Arial" pitchFamily="34" charset="0"/>
+                <a:ea typeface="Arial" pitchFamily="34" charset="-122"/>
+                <a:cs typeface="Arial" pitchFamily="34" charset="-120"/>
+              </a:rPr>
+              <a:t>   SOFTWARE</a:t>
+            </a:r>
+            <a:endParaRPr lang="en-US" sz="850" dirty="0"/>
+          </a:p>
+        </p:txBody>
+      </p:sp>
+      <p:sp>
+        <p:nvSpPr>
+          <p:cNvPr id="98" name="Shape 96"/>
+          <p:cNvSpPr/>
+          <p:nvPr/>
+        </p:nvSpPr>
+        <p:spPr>
+          <a:xfrm>
+            <a:off x="457200" y="4517136"/>
+            <a:ext cx="4489704" cy="384048"/>
           </a:xfrm>
           <a:prstGeom prst="roundRect">
             <a:avLst>
-              <a:gd name="adj" fmla="val 2469"/>
+              <a:gd name="adj" fmla="val 9524"/>
+            </a:avLst>
+          </a:prstGeom>
+          <a:solidFill>
+            <a:srgbClr val="F3F7FB"/>
+          </a:solidFill>
+          <a:ln w="10160">
+            <a:solidFill>
+              <a:srgbClr val="27628D"/>
+            </a:solidFill>
+            <a:prstDash val="solid"/>
+          </a:ln>
+        </p:spPr>
+      </p:sp>
+      <p:sp>
+        <p:nvSpPr>
+          <p:cNvPr id="99" name="Text 97"/>
+          <p:cNvSpPr/>
+          <p:nvPr/>
+        </p:nvSpPr>
+        <p:spPr>
+          <a:xfrm>
+            <a:off x="457200" y="4544568"/>
+            <a:ext cx="4489704" cy="182880"/>
+          </a:xfrm>
+          <a:prstGeom prst="rect">
+            <a:avLst/>
+          </a:prstGeom>
+          <a:noFill/>
+          <a:ln/>
+        </p:spPr>
+        <p:txBody>
+          <a:bodyPr wrap="square" lIns="0" tIns="0" rIns="0" bIns="0" rtlCol="0" anchor="ctr"/>
+          <a:lstStyle/>
+          <a:p>
+            <a:pPr algn="ctr" indent="0" marL="0">
+              <a:buNone/>
+            </a:pPr>
+            <a:r>
+              <a:rPr lang="en-US" sz="1050" b="1" dirty="0">
+                <a:solidFill>
+                  <a:srgbClr val="1F4E79"/>
+                </a:solidFill>
+                <a:latin typeface="Microsoft YaHei" pitchFamily="34" charset="0"/>
+                <a:ea typeface="Microsoft YaHei" pitchFamily="34" charset="-122"/>
+                <a:cs typeface="Microsoft YaHei" pitchFamily="34" charset="-120"/>
+              </a:rPr>
+              <a:t>WES 仓库执行系统</a:t>
+            </a:r>
+            <a:endParaRPr lang="en-US" sz="1050" dirty="0"/>
+          </a:p>
+        </p:txBody>
+      </p:sp>
+      <p:sp>
+        <p:nvSpPr>
+          <p:cNvPr id="100" name="Text 98"/>
+          <p:cNvSpPr/>
+          <p:nvPr/>
+        </p:nvSpPr>
+        <p:spPr>
+          <a:xfrm>
+            <a:off x="457200" y="4727448"/>
+            <a:ext cx="4489704" cy="146304"/>
+          </a:xfrm>
+          <a:prstGeom prst="rect">
+            <a:avLst/>
+          </a:prstGeom>
+          <a:noFill/>
+          <a:ln/>
+        </p:spPr>
+        <p:txBody>
+          <a:bodyPr wrap="square" lIns="0" tIns="0" rIns="0" bIns="0" rtlCol="0" anchor="ctr"/>
+          <a:lstStyle/>
+          <a:p>
+            <a:pPr algn="ctr" indent="0" marL="0">
+              <a:buNone/>
+            </a:pPr>
+            <a:r>
+              <a:rPr lang="en-US" sz="780" dirty="0">
+                <a:solidFill>
+                  <a:srgbClr val="98A2AC"/>
+                </a:solidFill>
+                <a:latin typeface="Microsoft YaHei" pitchFamily="34" charset="0"/>
+                <a:ea typeface="Microsoft YaHei" pitchFamily="34" charset="-122"/>
+                <a:cs typeface="Microsoft YaHei" pitchFamily="34" charset="-120"/>
+              </a:rPr>
+              <a:t>业务逻辑 / 库存 / 订单 / 工作站</a:t>
+            </a:r>
+            <a:endParaRPr lang="en-US" sz="780" dirty="0"/>
+          </a:p>
+        </p:txBody>
+      </p:sp>
+      <p:sp>
+        <p:nvSpPr>
+          <p:cNvPr id="101" name="Shape 99"/>
+          <p:cNvSpPr/>
+          <p:nvPr/>
+        </p:nvSpPr>
+        <p:spPr>
+          <a:xfrm>
+            <a:off x="5129784" y="4517136"/>
+            <a:ext cx="3209544" cy="384048"/>
+          </a:xfrm>
+          <a:prstGeom prst="roundRect">
+            <a:avLst>
+              <a:gd name="adj" fmla="val 9524"/>
+            </a:avLst>
+          </a:prstGeom>
+          <a:solidFill>
+            <a:srgbClr val="F3F7FB"/>
+          </a:solidFill>
+          <a:ln w="10160">
+            <a:solidFill>
+              <a:srgbClr val="27628D"/>
+            </a:solidFill>
+            <a:prstDash val="solid"/>
+          </a:ln>
+        </p:spPr>
+      </p:sp>
+      <p:sp>
+        <p:nvSpPr>
+          <p:cNvPr id="102" name="Text 100"/>
+          <p:cNvSpPr/>
+          <p:nvPr/>
+        </p:nvSpPr>
+        <p:spPr>
+          <a:xfrm>
+            <a:off x="5129784" y="4544568"/>
+            <a:ext cx="3209544" cy="182880"/>
+          </a:xfrm>
+          <a:prstGeom prst="rect">
+            <a:avLst/>
+          </a:prstGeom>
+          <a:noFill/>
+          <a:ln/>
+        </p:spPr>
+        <p:txBody>
+          <a:bodyPr wrap="square" lIns="0" tIns="0" rIns="0" bIns="0" rtlCol="0" anchor="ctr"/>
+          <a:lstStyle/>
+          <a:p>
+            <a:pPr algn="ctr" indent="0" marL="0">
+              <a:buNone/>
+            </a:pPr>
+            <a:r>
+              <a:rPr lang="en-US" sz="1050" b="1" dirty="0">
+                <a:solidFill>
+                  <a:srgbClr val="1F4E79"/>
+                </a:solidFill>
+                <a:latin typeface="Microsoft YaHei" pitchFamily="34" charset="0"/>
+                <a:ea typeface="Microsoft YaHei" pitchFamily="34" charset="-122"/>
+                <a:cs typeface="Microsoft YaHei" pitchFamily="34" charset="-120"/>
+              </a:rPr>
+              <a:t>ESS 设备调度系统</a:t>
+            </a:r>
+            <a:endParaRPr lang="en-US" sz="1050" dirty="0"/>
+          </a:p>
+        </p:txBody>
+      </p:sp>
+      <p:sp>
+        <p:nvSpPr>
+          <p:cNvPr id="103" name="Text 101"/>
+          <p:cNvSpPr/>
+          <p:nvPr/>
+        </p:nvSpPr>
+        <p:spPr>
+          <a:xfrm>
+            <a:off x="5129784" y="4727448"/>
+            <a:ext cx="3209544" cy="146304"/>
+          </a:xfrm>
+          <a:prstGeom prst="rect">
+            <a:avLst/>
+          </a:prstGeom>
+          <a:noFill/>
+          <a:ln/>
+        </p:spPr>
+        <p:txBody>
+          <a:bodyPr wrap="square" lIns="0" tIns="0" rIns="0" bIns="0" rtlCol="0" anchor="ctr"/>
+          <a:lstStyle/>
+          <a:p>
+            <a:pPr algn="ctr" indent="0" marL="0">
+              <a:buNone/>
+            </a:pPr>
+            <a:r>
+              <a:rPr lang="en-US" sz="780" dirty="0">
+                <a:solidFill>
+                  <a:srgbClr val="98A2AC"/>
+                </a:solidFill>
+                <a:latin typeface="Microsoft YaHei" pitchFamily="34" charset="0"/>
+                <a:ea typeface="Microsoft YaHei" pitchFamily="34" charset="-122"/>
+                <a:cs typeface="Microsoft YaHei" pitchFamily="34" charset="-120"/>
+              </a:rPr>
+              <a:t>机器人 / 路径 / 充电调度</a:t>
+            </a:r>
+            <a:endParaRPr lang="en-US" sz="780" dirty="0"/>
+          </a:p>
+        </p:txBody>
+      </p:sp>
+      <p:sp>
+        <p:nvSpPr>
+          <p:cNvPr id="104" name="Shape 102"/>
+          <p:cNvSpPr/>
+          <p:nvPr/>
+        </p:nvSpPr>
+        <p:spPr>
+          <a:xfrm>
+            <a:off x="8522208" y="4517136"/>
+            <a:ext cx="3209544" cy="384048"/>
+          </a:xfrm>
+          <a:prstGeom prst="roundRect">
+            <a:avLst>
+              <a:gd name="adj" fmla="val 9524"/>
+            </a:avLst>
+          </a:prstGeom>
+          <a:solidFill>
+            <a:srgbClr val="F3F7FB"/>
+          </a:solidFill>
+          <a:ln w="10160">
+            <a:solidFill>
+              <a:srgbClr val="27628D"/>
+            </a:solidFill>
+            <a:prstDash val="solid"/>
+          </a:ln>
+        </p:spPr>
+      </p:sp>
+      <p:sp>
+        <p:nvSpPr>
+          <p:cNvPr id="105" name="Text 103"/>
+          <p:cNvSpPr/>
+          <p:nvPr/>
+        </p:nvSpPr>
+        <p:spPr>
+          <a:xfrm>
+            <a:off x="8522208" y="4544568"/>
+            <a:ext cx="3209544" cy="182880"/>
+          </a:xfrm>
+          <a:prstGeom prst="rect">
+            <a:avLst/>
+          </a:prstGeom>
+          <a:noFill/>
+          <a:ln/>
+        </p:spPr>
+        <p:txBody>
+          <a:bodyPr wrap="square" lIns="0" tIns="0" rIns="0" bIns="0" rtlCol="0" anchor="ctr"/>
+          <a:lstStyle/>
+          <a:p>
+            <a:pPr algn="ctr" indent="0" marL="0">
+              <a:buNone/>
+            </a:pPr>
+            <a:r>
+              <a:rPr lang="en-US" sz="1050" b="1" dirty="0">
+                <a:solidFill>
+                  <a:srgbClr val="1F4E79"/>
+                </a:solidFill>
+                <a:latin typeface="Microsoft YaHei" pitchFamily="34" charset="0"/>
+                <a:ea typeface="Microsoft YaHei" pitchFamily="34" charset="-122"/>
+                <a:cs typeface="Microsoft YaHei" pitchFamily="34" charset="-120"/>
+              </a:rPr>
+              <a:t>DP 数据平台</a:t>
+            </a:r>
+            <a:endParaRPr lang="en-US" sz="1050" dirty="0"/>
+          </a:p>
+        </p:txBody>
+      </p:sp>
+      <p:sp>
+        <p:nvSpPr>
+          <p:cNvPr id="106" name="Text 104"/>
+          <p:cNvSpPr/>
+          <p:nvPr/>
+        </p:nvSpPr>
+        <p:spPr>
+          <a:xfrm>
+            <a:off x="8522208" y="4727448"/>
+            <a:ext cx="3209544" cy="146304"/>
+          </a:xfrm>
+          <a:prstGeom prst="rect">
+            <a:avLst/>
+          </a:prstGeom>
+          <a:noFill/>
+          <a:ln/>
+        </p:spPr>
+        <p:txBody>
+          <a:bodyPr wrap="square" lIns="0" tIns="0" rIns="0" bIns="0" rtlCol="0" anchor="ctr"/>
+          <a:lstStyle/>
+          <a:p>
+            <a:pPr algn="ctr" indent="0" marL="0">
+              <a:buNone/>
+            </a:pPr>
+            <a:r>
+              <a:rPr lang="en-US" sz="780" dirty="0">
+                <a:solidFill>
+                  <a:srgbClr val="98A2AC"/>
+                </a:solidFill>
+                <a:latin typeface="Microsoft YaHei" pitchFamily="34" charset="0"/>
+                <a:ea typeface="Microsoft YaHei" pitchFamily="34" charset="-122"/>
+                <a:cs typeface="Microsoft YaHei" pitchFamily="34" charset="-120"/>
+              </a:rPr>
+              <a:t>报表 / 预警 / 分析</a:t>
+            </a:r>
+            <a:endParaRPr lang="en-US" sz="780" dirty="0"/>
+          </a:p>
+        </p:txBody>
+      </p:sp>
+      <p:sp>
+        <p:nvSpPr>
+          <p:cNvPr id="107" name="Text 105"/>
+          <p:cNvSpPr/>
+          <p:nvPr/>
+        </p:nvSpPr>
+        <p:spPr>
+          <a:xfrm>
+            <a:off x="457200" y="4956048"/>
+            <a:ext cx="1554480" cy="182880"/>
+          </a:xfrm>
+          <a:prstGeom prst="rect">
+            <a:avLst/>
+          </a:prstGeom>
+          <a:noFill/>
+          <a:ln/>
+        </p:spPr>
+        <p:txBody>
+          <a:bodyPr wrap="square" lIns="0" tIns="0" rIns="0" bIns="0" rtlCol="0" anchor="ctr"/>
+          <a:lstStyle/>
+          <a:p>
+            <a:pPr algn="l" indent="0" marL="0">
+              <a:buNone/>
+            </a:pPr>
+            <a:r>
+              <a:rPr lang="en-US" sz="820" b="1" dirty="0">
+                <a:solidFill>
+                  <a:srgbClr val="27628D"/>
+                </a:solidFill>
+                <a:latin typeface="Microsoft YaHei" pitchFamily="34" charset="0"/>
+                <a:ea typeface="Microsoft YaHei" pitchFamily="34" charset="-122"/>
+                <a:cs typeface="Microsoft YaHei" pitchFamily="34" charset="-120"/>
+              </a:rPr>
+              <a:t>业务功能模块</a:t>
+            </a:r>
+            <a:endParaRPr lang="en-US" sz="820" dirty="0"/>
+          </a:p>
+        </p:txBody>
+      </p:sp>
+      <p:sp>
+        <p:nvSpPr>
+          <p:cNvPr id="108" name="Shape 106"/>
+          <p:cNvSpPr/>
+          <p:nvPr/>
+        </p:nvSpPr>
+        <p:spPr>
+          <a:xfrm>
+            <a:off x="2057400" y="4937760"/>
+            <a:ext cx="1847088" cy="237744"/>
+          </a:xfrm>
+          <a:prstGeom prst="roundRect">
+            <a:avLst>
+              <a:gd name="adj" fmla="val 19231"/>
+            </a:avLst>
+          </a:prstGeom>
+          <a:solidFill>
+            <a:srgbClr val="EDF1F5"/>
+          </a:solidFill>
+          <a:ln/>
+        </p:spPr>
+      </p:sp>
+      <p:sp>
+        <p:nvSpPr>
+          <p:cNvPr id="109" name="Text 107"/>
+          <p:cNvSpPr/>
+          <p:nvPr/>
+        </p:nvSpPr>
+        <p:spPr>
+          <a:xfrm>
+            <a:off x="2057400" y="4937760"/>
+            <a:ext cx="1847088" cy="237744"/>
+          </a:xfrm>
+          <a:prstGeom prst="rect">
+            <a:avLst/>
+          </a:prstGeom>
+          <a:noFill/>
+          <a:ln/>
+        </p:spPr>
+        <p:txBody>
+          <a:bodyPr wrap="square" lIns="0" tIns="0" rIns="0" bIns="0" rtlCol="0" anchor="ctr"/>
+          <a:lstStyle/>
+          <a:p>
+            <a:pPr algn="ctr" indent="0" marL="0">
+              <a:buNone/>
+            </a:pPr>
+            <a:r>
+              <a:rPr lang="en-US" sz="820" dirty="0">
+                <a:solidFill>
+                  <a:srgbClr val="262626"/>
+                </a:solidFill>
+                <a:latin typeface="Microsoft YaHei" pitchFamily="34" charset="0"/>
+                <a:ea typeface="Microsoft YaHei" pitchFamily="34" charset="-122"/>
+                <a:cs typeface="Microsoft YaHei" pitchFamily="34" charset="-120"/>
+              </a:rPr>
+              <a:t>基础资料</a:t>
+            </a:r>
+            <a:endParaRPr lang="en-US" sz="820" dirty="0"/>
+          </a:p>
+        </p:txBody>
+      </p:sp>
+      <p:sp>
+        <p:nvSpPr>
+          <p:cNvPr id="110" name="Shape 108"/>
+          <p:cNvSpPr/>
+          <p:nvPr/>
+        </p:nvSpPr>
+        <p:spPr>
+          <a:xfrm>
+            <a:off x="4014216" y="4937760"/>
+            <a:ext cx="1847088" cy="237744"/>
+          </a:xfrm>
+          <a:prstGeom prst="roundRect">
+            <a:avLst>
+              <a:gd name="adj" fmla="val 19231"/>
+            </a:avLst>
+          </a:prstGeom>
+          <a:solidFill>
+            <a:srgbClr val="EDF1F5"/>
+          </a:solidFill>
+          <a:ln/>
+        </p:spPr>
+      </p:sp>
+      <p:sp>
+        <p:nvSpPr>
+          <p:cNvPr id="111" name="Text 109"/>
+          <p:cNvSpPr/>
+          <p:nvPr/>
+        </p:nvSpPr>
+        <p:spPr>
+          <a:xfrm>
+            <a:off x="4014216" y="4937760"/>
+            <a:ext cx="1847088" cy="237744"/>
+          </a:xfrm>
+          <a:prstGeom prst="rect">
+            <a:avLst/>
+          </a:prstGeom>
+          <a:noFill/>
+          <a:ln/>
+        </p:spPr>
+        <p:txBody>
+          <a:bodyPr wrap="square" lIns="0" tIns="0" rIns="0" bIns="0" rtlCol="0" anchor="ctr"/>
+          <a:lstStyle/>
+          <a:p>
+            <a:pPr algn="ctr" indent="0" marL="0">
+              <a:buNone/>
+            </a:pPr>
+            <a:r>
+              <a:rPr lang="en-US" sz="820" dirty="0">
+                <a:solidFill>
+                  <a:srgbClr val="262626"/>
+                </a:solidFill>
+                <a:latin typeface="Microsoft YaHei" pitchFamily="34" charset="0"/>
+                <a:ea typeface="Microsoft YaHei" pitchFamily="34" charset="-122"/>
+                <a:cs typeface="Microsoft YaHei" pitchFamily="34" charset="-120"/>
+              </a:rPr>
+              <a:t>入库模块</a:t>
+            </a:r>
+            <a:endParaRPr lang="en-US" sz="820" dirty="0"/>
+          </a:p>
+        </p:txBody>
+      </p:sp>
+      <p:sp>
+        <p:nvSpPr>
+          <p:cNvPr id="112" name="Shape 110"/>
+          <p:cNvSpPr/>
+          <p:nvPr/>
+        </p:nvSpPr>
+        <p:spPr>
+          <a:xfrm>
+            <a:off x="5971032" y="4937760"/>
+            <a:ext cx="1847088" cy="237744"/>
+          </a:xfrm>
+          <a:prstGeom prst="roundRect">
+            <a:avLst>
+              <a:gd name="adj" fmla="val 19231"/>
+            </a:avLst>
+          </a:prstGeom>
+          <a:solidFill>
+            <a:srgbClr val="EDF1F5"/>
+          </a:solidFill>
+          <a:ln/>
+        </p:spPr>
+      </p:sp>
+      <p:sp>
+        <p:nvSpPr>
+          <p:cNvPr id="113" name="Text 111"/>
+          <p:cNvSpPr/>
+          <p:nvPr/>
+        </p:nvSpPr>
+        <p:spPr>
+          <a:xfrm>
+            <a:off x="5971032" y="4937760"/>
+            <a:ext cx="1847088" cy="237744"/>
+          </a:xfrm>
+          <a:prstGeom prst="rect">
+            <a:avLst/>
+          </a:prstGeom>
+          <a:noFill/>
+          <a:ln/>
+        </p:spPr>
+        <p:txBody>
+          <a:bodyPr wrap="square" lIns="0" tIns="0" rIns="0" bIns="0" rtlCol="0" anchor="ctr"/>
+          <a:lstStyle/>
+          <a:p>
+            <a:pPr algn="ctr" indent="0" marL="0">
+              <a:buNone/>
+            </a:pPr>
+            <a:r>
+              <a:rPr lang="en-US" sz="820" dirty="0">
+                <a:solidFill>
+                  <a:srgbClr val="262626"/>
+                </a:solidFill>
+                <a:latin typeface="Microsoft YaHei" pitchFamily="34" charset="0"/>
+                <a:ea typeface="Microsoft YaHei" pitchFamily="34" charset="-122"/>
+                <a:cs typeface="Microsoft YaHei" pitchFamily="34" charset="-120"/>
+              </a:rPr>
+              <a:t>出库模块</a:t>
+            </a:r>
+            <a:endParaRPr lang="en-US" sz="820" dirty="0"/>
+          </a:p>
+        </p:txBody>
+      </p:sp>
+      <p:sp>
+        <p:nvSpPr>
+          <p:cNvPr id="114" name="Shape 112"/>
+          <p:cNvSpPr/>
+          <p:nvPr/>
+        </p:nvSpPr>
+        <p:spPr>
+          <a:xfrm>
+            <a:off x="7927848" y="4937760"/>
+            <a:ext cx="1847088" cy="237744"/>
+          </a:xfrm>
+          <a:prstGeom prst="roundRect">
+            <a:avLst>
+              <a:gd name="adj" fmla="val 19231"/>
+            </a:avLst>
+          </a:prstGeom>
+          <a:solidFill>
+            <a:srgbClr val="EDF1F5"/>
+          </a:solidFill>
+          <a:ln/>
+        </p:spPr>
+      </p:sp>
+      <p:sp>
+        <p:nvSpPr>
+          <p:cNvPr id="115" name="Text 113"/>
+          <p:cNvSpPr/>
+          <p:nvPr/>
+        </p:nvSpPr>
+        <p:spPr>
+          <a:xfrm>
+            <a:off x="7927848" y="4937760"/>
+            <a:ext cx="1847088" cy="237744"/>
+          </a:xfrm>
+          <a:prstGeom prst="rect">
+            <a:avLst/>
+          </a:prstGeom>
+          <a:noFill/>
+          <a:ln/>
+        </p:spPr>
+        <p:txBody>
+          <a:bodyPr wrap="square" lIns="0" tIns="0" rIns="0" bIns="0" rtlCol="0" anchor="ctr"/>
+          <a:lstStyle/>
+          <a:p>
+            <a:pPr algn="ctr" indent="0" marL="0">
+              <a:buNone/>
+            </a:pPr>
+            <a:r>
+              <a:rPr lang="en-US" sz="820" dirty="0">
+                <a:solidFill>
+                  <a:srgbClr val="262626"/>
+                </a:solidFill>
+                <a:latin typeface="Microsoft YaHei" pitchFamily="34" charset="0"/>
+                <a:ea typeface="Microsoft YaHei" pitchFamily="34" charset="-122"/>
+                <a:cs typeface="Microsoft YaHei" pitchFamily="34" charset="-120"/>
+              </a:rPr>
+              <a:t>库内模块</a:t>
+            </a:r>
+            <a:endParaRPr lang="en-US" sz="820" dirty="0"/>
+          </a:p>
+        </p:txBody>
+      </p:sp>
+      <p:sp>
+        <p:nvSpPr>
+          <p:cNvPr id="116" name="Shape 114"/>
+          <p:cNvSpPr/>
+          <p:nvPr/>
+        </p:nvSpPr>
+        <p:spPr>
+          <a:xfrm>
+            <a:off x="9884664" y="4937760"/>
+            <a:ext cx="1847088" cy="237744"/>
+          </a:xfrm>
+          <a:prstGeom prst="roundRect">
+            <a:avLst>
+              <a:gd name="adj" fmla="val 19231"/>
+            </a:avLst>
+          </a:prstGeom>
+          <a:solidFill>
+            <a:srgbClr val="EDF1F5"/>
+          </a:solidFill>
+          <a:ln/>
+        </p:spPr>
+      </p:sp>
+      <p:sp>
+        <p:nvSpPr>
+          <p:cNvPr id="117" name="Text 115"/>
+          <p:cNvSpPr/>
+          <p:nvPr/>
+        </p:nvSpPr>
+        <p:spPr>
+          <a:xfrm>
+            <a:off x="9884664" y="4937760"/>
+            <a:ext cx="1847088" cy="237744"/>
+          </a:xfrm>
+          <a:prstGeom prst="rect">
+            <a:avLst/>
+          </a:prstGeom>
+          <a:noFill/>
+          <a:ln/>
+        </p:spPr>
+        <p:txBody>
+          <a:bodyPr wrap="square" lIns="0" tIns="0" rIns="0" bIns="0" rtlCol="0" anchor="ctr"/>
+          <a:lstStyle/>
+          <a:p>
+            <a:pPr algn="ctr" indent="0" marL="0">
+              <a:buNone/>
+            </a:pPr>
+            <a:r>
+              <a:rPr lang="en-US" sz="820" dirty="0">
+                <a:solidFill>
+                  <a:srgbClr val="262626"/>
+                </a:solidFill>
+                <a:latin typeface="Microsoft YaHei" pitchFamily="34" charset="0"/>
+                <a:ea typeface="Microsoft YaHei" pitchFamily="34" charset="-122"/>
+                <a:cs typeface="Microsoft YaHei" pitchFamily="34" charset="-120"/>
+              </a:rPr>
+              <a:t>系统管理</a:t>
+            </a:r>
+            <a:endParaRPr lang="en-US" sz="820" dirty="0"/>
+          </a:p>
+        </p:txBody>
+      </p:sp>
+      <p:sp>
+        <p:nvSpPr>
+          <p:cNvPr id="118" name="Text 116"/>
+          <p:cNvSpPr/>
+          <p:nvPr/>
+        </p:nvSpPr>
+        <p:spPr>
+          <a:xfrm>
+            <a:off x="457200" y="5230368"/>
+            <a:ext cx="11274552" cy="118872"/>
+          </a:xfrm>
+          <a:prstGeom prst="rect">
+            <a:avLst/>
+          </a:prstGeom>
+          <a:noFill/>
+          <a:ln/>
+        </p:spPr>
+        <p:txBody>
+          <a:bodyPr wrap="square" lIns="0" tIns="0" rIns="0" bIns="0" rtlCol="0" anchor="ctr"/>
+          <a:lstStyle/>
+          <a:p>
+            <a:pPr algn="ctr" indent="0" marL="0">
+              <a:buNone/>
+            </a:pPr>
+            <a:r>
+              <a:rPr lang="en-US" sz="760" dirty="0">
+                <a:solidFill>
+                  <a:srgbClr val="8A929B"/>
+                </a:solidFill>
+                <a:latin typeface="Microsoft YaHei" pitchFamily="34" charset="0"/>
+                <a:ea typeface="Microsoft YaHei" pitchFamily="34" charset="-122"/>
+                <a:cs typeface="Microsoft YaHei" pitchFamily="34" charset="-120"/>
+              </a:rPr>
+              <a:t>ESS 任务下发 / 设备状态回传</a:t>
+            </a:r>
+            <a:endParaRPr lang="en-US" sz="760" dirty="0"/>
+          </a:p>
+        </p:txBody>
+      </p:sp>
+      <p:sp>
+        <p:nvSpPr>
+          <p:cNvPr id="119" name="Shape 117"/>
+          <p:cNvSpPr/>
+          <p:nvPr/>
+        </p:nvSpPr>
+        <p:spPr>
+          <a:xfrm>
+            <a:off x="3200400" y="5358384"/>
+            <a:ext cx="0" cy="91440"/>
+          </a:xfrm>
+          <a:prstGeom prst="line">
+            <a:avLst/>
+          </a:prstGeom>
+          <a:noFill/>
+          <a:ln w="12700">
+            <a:solidFill>
+              <a:srgbClr val="27628D"/>
+            </a:solidFill>
+            <a:prstDash val="solid"/>
+            <a:headEnd type="triangle"/>
+            <a:tailEnd type="triangle"/>
+          </a:ln>
+        </p:spPr>
+      </p:sp>
+      <p:sp>
+        <p:nvSpPr>
+          <p:cNvPr id="120" name="Shape 118"/>
+          <p:cNvSpPr/>
+          <p:nvPr/>
+        </p:nvSpPr>
+        <p:spPr>
+          <a:xfrm>
+            <a:off x="6089904" y="5358384"/>
+            <a:ext cx="0" cy="91440"/>
+          </a:xfrm>
+          <a:prstGeom prst="line">
+            <a:avLst/>
+          </a:prstGeom>
+          <a:noFill/>
+          <a:ln w="12700">
+            <a:solidFill>
+              <a:srgbClr val="27628D"/>
+            </a:solidFill>
+            <a:prstDash val="solid"/>
+            <a:headEnd type="triangle"/>
+            <a:tailEnd type="triangle"/>
+          </a:ln>
+        </p:spPr>
+      </p:sp>
+      <p:sp>
+        <p:nvSpPr>
+          <p:cNvPr id="121" name="Shape 119"/>
+          <p:cNvSpPr/>
+          <p:nvPr/>
+        </p:nvSpPr>
+        <p:spPr>
+          <a:xfrm>
+            <a:off x="8961120" y="5358384"/>
+            <a:ext cx="0" cy="91440"/>
+          </a:xfrm>
+          <a:prstGeom prst="line">
+            <a:avLst/>
+          </a:prstGeom>
+          <a:noFill/>
+          <a:ln w="12700">
+            <a:solidFill>
+              <a:srgbClr val="27628D"/>
+            </a:solidFill>
+            <a:prstDash val="solid"/>
+            <a:headEnd type="triangle"/>
+            <a:tailEnd type="triangle"/>
+          </a:ln>
+        </p:spPr>
+      </p:sp>
+      <p:sp>
+        <p:nvSpPr>
+          <p:cNvPr id="122" name="Shape 120"/>
+          <p:cNvSpPr/>
+          <p:nvPr/>
+        </p:nvSpPr>
+        <p:spPr>
+          <a:xfrm>
+            <a:off x="457200" y="5468112"/>
+            <a:ext cx="5500116" cy="877824"/>
+          </a:xfrm>
+          <a:prstGeom prst="roundRect">
+            <a:avLst>
+              <a:gd name="adj" fmla="val 4167"/>
             </a:avLst>
           </a:prstGeom>
           <a:solidFill>
@@ -4184,202 +5049,18 @@
       </p:sp>
       <p:sp>
         <p:nvSpPr>
-          <p:cNvPr id="97" name="Text 95"/>
-          <p:cNvSpPr/>
-          <p:nvPr/>
-        </p:nvSpPr>
-        <p:spPr>
-          <a:xfrm>
-            <a:off x="603504" y="4608576"/>
-            <a:ext cx="3300984" cy="201168"/>
-          </a:xfrm>
-          <a:prstGeom prst="rect">
-            <a:avLst/>
-          </a:prstGeom>
-          <a:noFill/>
-          <a:ln/>
-        </p:spPr>
-        <p:txBody>
-          <a:bodyPr wrap="square" lIns="0" tIns="0" rIns="0" bIns="0" rtlCol="0" anchor="ctr"/>
-          <a:lstStyle/>
-          <a:p>
-            <a:pPr algn="l" indent="0" marL="0">
-              <a:buNone/>
-            </a:pPr>
-            <a:r>
-              <a:rPr lang="en-US" sz="1100" b="1" dirty="0">
-                <a:solidFill>
-                  <a:srgbClr val="1F4E79"/>
-                </a:solidFill>
-                <a:latin typeface="Microsoft YaHei" pitchFamily="34" charset="0"/>
-                <a:ea typeface="Microsoft YaHei" pitchFamily="34" charset="-122"/>
-                <a:cs typeface="Microsoft YaHei" pitchFamily="34" charset="-120"/>
-              </a:rPr>
-              <a:t>海柔 HAIQ · 软件平台</a:t>
-            </a:r>
-            <a:endParaRPr lang="en-US" sz="1100" dirty="0"/>
-          </a:p>
-        </p:txBody>
-      </p:sp>
-      <p:sp>
-        <p:nvSpPr>
-          <p:cNvPr id="98" name="Text 96"/>
-          <p:cNvSpPr/>
-          <p:nvPr/>
-        </p:nvSpPr>
-        <p:spPr>
-          <a:xfrm>
-            <a:off x="603504" y="4809744"/>
-            <a:ext cx="3300984" cy="128016"/>
-          </a:xfrm>
-          <a:prstGeom prst="rect">
-            <a:avLst/>
-          </a:prstGeom>
-          <a:noFill/>
-          <a:ln/>
-        </p:spPr>
-        <p:txBody>
-          <a:bodyPr wrap="square" lIns="0" tIns="0" rIns="0" bIns="0" rtlCol="0" anchor="ctr"/>
-          <a:lstStyle/>
-          <a:p>
-            <a:pPr algn="l" indent="0" marL="0">
-              <a:buNone/>
-            </a:pPr>
-            <a:r>
-              <a:rPr lang="en-US" sz="750" b="1" spc="100" kern="0" dirty="0">
-                <a:solidFill>
-                  <a:srgbClr val="8A929B"/>
-                </a:solidFill>
-                <a:latin typeface="Arial" pitchFamily="34" charset="0"/>
-                <a:ea typeface="Arial" pitchFamily="34" charset="-122"/>
-                <a:cs typeface="Arial" pitchFamily="34" charset="-120"/>
-              </a:rPr>
-              <a:t>SOFTWARE / HAIQ</a:t>
-            </a:r>
-            <a:endParaRPr lang="en-US" sz="750" dirty="0"/>
-          </a:p>
-        </p:txBody>
-      </p:sp>
-      <p:sp>
-        <p:nvSpPr>
-          <p:cNvPr id="99" name="Text 97"/>
-          <p:cNvSpPr/>
-          <p:nvPr/>
-        </p:nvSpPr>
-        <p:spPr>
-          <a:xfrm>
-            <a:off x="621792" y="4992624"/>
-            <a:ext cx="3264408" cy="960120"/>
-          </a:xfrm>
-          <a:prstGeom prst="rect">
-            <a:avLst/>
-          </a:prstGeom>
-          <a:noFill/>
-          <a:ln/>
-        </p:spPr>
-        <p:txBody>
-          <a:bodyPr wrap="square" lIns="0" tIns="0" rIns="0" bIns="0" rtlCol="0" anchor="t"/>
-          <a:lstStyle/>
-          <a:p>
-            <a:pPr marL="152400" indent="-152400">
-              <a:spcAft>
-                <a:spcPts val="400"/>
-              </a:spcAft>
-              <a:buSzPct val="100000"/>
-              <a:buChar char="•"/>
-            </a:pPr>
-            <a:r>
-              <a:rPr lang="en-US" sz="860" dirty="0">
-                <a:solidFill>
-                  <a:srgbClr val="2F4458"/>
-                </a:solidFill>
-                <a:latin typeface="Microsoft YaHei" pitchFamily="34" charset="0"/>
-                <a:ea typeface="Microsoft YaHei" pitchFamily="34" charset="-122"/>
-                <a:cs typeface="Microsoft YaHei" pitchFamily="34" charset="-120"/>
-              </a:rPr>
-              <a:t>WES 仓库执行系统：业务 / 库存 / 订单 / 工作站</a:t>
-            </a:r>
-            <a:endParaRPr lang="en-US" sz="860" dirty="0"/>
-          </a:p>
-          <a:p>
-            <a:pPr marL="152400" indent="-152400">
-              <a:spcAft>
-                <a:spcPts val="400"/>
-              </a:spcAft>
-              <a:buSzPct val="100000"/>
-              <a:buChar char="•"/>
-            </a:pPr>
-            <a:r>
-              <a:rPr lang="en-US" sz="860" dirty="0">
-                <a:solidFill>
-                  <a:srgbClr val="2F4458"/>
-                </a:solidFill>
-                <a:latin typeface="Microsoft YaHei" pitchFamily="34" charset="0"/>
-                <a:ea typeface="Microsoft YaHei" pitchFamily="34" charset="-122"/>
-                <a:cs typeface="Microsoft YaHei" pitchFamily="34" charset="-120"/>
-              </a:rPr>
-              <a:t>ESS 设备调度系统：机器人 / 路径 / 充电调度</a:t>
-            </a:r>
-            <a:endParaRPr lang="en-US" sz="860" dirty="0"/>
-          </a:p>
-          <a:p>
-            <a:pPr marL="152400" indent="-152400">
-              <a:spcAft>
-                <a:spcPts val="400"/>
-              </a:spcAft>
-              <a:buSzPct val="100000"/>
-              <a:buChar char="•"/>
-            </a:pPr>
-            <a:r>
-              <a:rPr lang="en-US" sz="860" dirty="0">
-                <a:solidFill>
-                  <a:srgbClr val="2F4458"/>
-                </a:solidFill>
-                <a:latin typeface="Microsoft YaHei" pitchFamily="34" charset="0"/>
-                <a:ea typeface="Microsoft YaHei" pitchFamily="34" charset="-122"/>
-                <a:cs typeface="Microsoft YaHei" pitchFamily="34" charset="-120"/>
-              </a:rPr>
-              <a:t>DP 数据平台：报表 / 预警 / 分析</a:t>
-            </a:r>
-            <a:endParaRPr lang="en-US" sz="860" dirty="0"/>
-          </a:p>
-          <a:p>
-            <a:pPr marL="152400" indent="-152400">
-              <a:spcAft>
-                <a:spcPts val="400"/>
-              </a:spcAft>
-              <a:buSzPct val="100000"/>
-              <a:buChar char="•"/>
-            </a:pPr>
-            <a:r>
-              <a:rPr lang="en-US" sz="860" dirty="0">
-                <a:solidFill>
-                  <a:srgbClr val="2F4458"/>
-                </a:solidFill>
-                <a:latin typeface="Microsoft YaHei" pitchFamily="34" charset="0"/>
-                <a:ea typeface="Microsoft YaHei" pitchFamily="34" charset="-122"/>
-                <a:cs typeface="Microsoft YaHei" pitchFamily="34" charset="-120"/>
-              </a:rPr>
-              <a:t>可视化：全仓任务 · 指令执行 · 异常工单 · 数字孪生</a:t>
-            </a:r>
-            <a:endParaRPr lang="en-US" sz="860" dirty="0"/>
-          </a:p>
-        </p:txBody>
-      </p:sp>
-      <p:sp>
-        <p:nvSpPr>
-          <p:cNvPr id="100" name="Shape 98"/>
-          <p:cNvSpPr/>
-          <p:nvPr/>
-        </p:nvSpPr>
-        <p:spPr>
-          <a:xfrm>
-            <a:off x="4306824" y="4553712"/>
-            <a:ext cx="3575304" cy="1481328"/>
+          <p:cNvPr id="123" name="Shape 121"/>
+          <p:cNvSpPr/>
+          <p:nvPr/>
+        </p:nvSpPr>
+        <p:spPr>
+          <a:xfrm>
+            <a:off x="6231636" y="5468112"/>
+            <a:ext cx="5500116" cy="877824"/>
           </a:xfrm>
           <a:prstGeom prst="roundRect">
             <a:avLst>
-              <a:gd name="adj" fmla="val 2469"/>
+              <a:gd name="adj" fmla="val 4167"/>
             </a:avLst>
           </a:prstGeom>
           <a:solidFill>
@@ -4395,14 +5076,14 @@
       </p:sp>
       <p:sp>
         <p:nvSpPr>
-          <p:cNvPr id="101" name="Text 99"/>
-          <p:cNvSpPr/>
-          <p:nvPr/>
-        </p:nvSpPr>
-        <p:spPr>
-          <a:xfrm>
-            <a:off x="4453128" y="4608576"/>
-            <a:ext cx="3300984" cy="201168"/>
+          <p:cNvPr id="124" name="Text 122"/>
+          <p:cNvSpPr/>
+          <p:nvPr/>
+        </p:nvSpPr>
+        <p:spPr>
+          <a:xfrm>
+            <a:off x="603504" y="5522976"/>
+            <a:ext cx="5225796" cy="146304"/>
           </a:xfrm>
           <a:prstGeom prst="rect">
             <a:avLst/>
@@ -4418,46 +5099,21 @@
               <a:buNone/>
             </a:pPr>
             <a:r>
-              <a:rPr lang="en-US" sz="1100" b="1" dirty="0">
-                <a:solidFill>
-                  <a:srgbClr val="1F4E79"/>
-                </a:solidFill>
-                <a:latin typeface="Microsoft YaHei" pitchFamily="34" charset="0"/>
-                <a:ea typeface="Microsoft YaHei" pitchFamily="34" charset="-122"/>
-                <a:cs typeface="Microsoft YaHei" pitchFamily="34" charset="-120"/>
-              </a:rPr>
-              <a:t>设备资源 · ACR &amp; 充电</a:t>
-            </a:r>
-            <a:endParaRPr lang="en-US" sz="1100" dirty="0"/>
-          </a:p>
-        </p:txBody>
-      </p:sp>
-      <p:sp>
-        <p:nvSpPr>
-          <p:cNvPr id="102" name="Text 100"/>
-          <p:cNvSpPr/>
-          <p:nvPr/>
-        </p:nvSpPr>
-        <p:spPr>
-          <a:xfrm>
-            <a:off x="4453128" y="4809744"/>
-            <a:ext cx="3300984" cy="128016"/>
-          </a:xfrm>
-          <a:prstGeom prst="rect">
-            <a:avLst/>
-          </a:prstGeom>
-          <a:noFill/>
-          <a:ln/>
-        </p:spPr>
-        <p:txBody>
-          <a:bodyPr wrap="square" lIns="0" tIns="0" rIns="0" bIns="0" rtlCol="0" anchor="ctr"/>
-          <a:lstStyle/>
-          <a:p>
+              <a:rPr lang="en-US" sz="850" b="1" dirty="0">
+                <a:solidFill>
+                  <a:srgbClr val="27628D"/>
+                </a:solidFill>
+                <a:latin typeface="Microsoft YaHei" pitchFamily="34" charset="0"/>
+                <a:ea typeface="Microsoft YaHei" pitchFamily="34" charset="-122"/>
+                <a:cs typeface="Microsoft YaHei" pitchFamily="34" charset="-120"/>
+              </a:rPr>
+              <a:t>设备资源层</a:t>
+            </a:r>
             <a:pPr algn="l" indent="0" marL="0">
               <a:buNone/>
             </a:pPr>
             <a:r>
-              <a:rPr lang="en-US" sz="750" b="1" spc="100" kern="0" dirty="0">
+              <a:rPr lang="en-US" sz="700" dirty="0">
                 <a:solidFill>
                   <a:srgbClr val="8A929B"/>
                 </a:solidFill>
@@ -4465,22 +5121,75 @@
                 <a:ea typeface="Arial" pitchFamily="34" charset="-122"/>
                 <a:cs typeface="Arial" pitchFamily="34" charset="-120"/>
               </a:rPr>
-              <a:t>EQUIPMENT</a:t>
-            </a:r>
-            <a:endParaRPr lang="en-US" sz="750" dirty="0"/>
-          </a:p>
-        </p:txBody>
-      </p:sp>
-      <p:sp>
-        <p:nvSpPr>
-          <p:cNvPr id="103" name="Text 101"/>
-          <p:cNvSpPr/>
-          <p:nvPr/>
-        </p:nvSpPr>
-        <p:spPr>
-          <a:xfrm>
-            <a:off x="4471416" y="4992624"/>
-            <a:ext cx="3264408" cy="960120"/>
+              <a:t>   EQUIPMENT</a:t>
+            </a:r>
+            <a:endParaRPr lang="en-US" sz="850" dirty="0"/>
+          </a:p>
+        </p:txBody>
+      </p:sp>
+      <p:sp>
+        <p:nvSpPr>
+          <p:cNvPr id="125" name="Text 123"/>
+          <p:cNvSpPr/>
+          <p:nvPr/>
+        </p:nvSpPr>
+        <p:spPr>
+          <a:xfrm>
+            <a:off x="6377940" y="5522976"/>
+            <a:ext cx="5225796" cy="146304"/>
+          </a:xfrm>
+          <a:prstGeom prst="rect">
+            <a:avLst/>
+          </a:prstGeom>
+          <a:noFill/>
+          <a:ln/>
+        </p:spPr>
+        <p:txBody>
+          <a:bodyPr wrap="square" lIns="0" tIns="0" rIns="0" bIns="0" rtlCol="0" anchor="ctr"/>
+          <a:lstStyle/>
+          <a:p>
+            <a:pPr algn="l" indent="0" marL="0">
+              <a:buNone/>
+            </a:pPr>
+            <a:r>
+              <a:rPr lang="en-US" sz="850" b="1" dirty="0">
+                <a:solidFill>
+                  <a:srgbClr val="27628D"/>
+                </a:solidFill>
+                <a:latin typeface="Microsoft YaHei" pitchFamily="34" charset="0"/>
+                <a:ea typeface="Microsoft YaHei" pitchFamily="34" charset="-122"/>
+                <a:cs typeface="Microsoft YaHei" pitchFamily="34" charset="-120"/>
+              </a:rPr>
+              <a:t>工作站层</a:t>
+            </a:r>
+            <a:pPr algn="l" indent="0" marL="0">
+              <a:buNone/>
+            </a:pPr>
+            <a:r>
+              <a:rPr lang="en-US" sz="700" dirty="0">
+                <a:solidFill>
+                  <a:srgbClr val="8A929B"/>
+                </a:solidFill>
+                <a:latin typeface="Arial" pitchFamily="34" charset="0"/>
+                <a:ea typeface="Arial" pitchFamily="34" charset="-122"/>
+                <a:cs typeface="Arial" pitchFamily="34" charset="-120"/>
+              </a:rPr>
+              <a:t>   WORKSTATIONS</a:t>
+            </a:r>
+            <a:endParaRPr lang="en-US" sz="850" dirty="0"/>
+          </a:p>
+        </p:txBody>
+      </p:sp>
+      <p:sp>
+        <p:nvSpPr>
+          <p:cNvPr id="126" name="Text 124"/>
+          <p:cNvSpPr/>
+          <p:nvPr/>
+        </p:nvSpPr>
+        <p:spPr>
+          <a:xfrm>
+            <a:off x="621792" y="5705856"/>
+            <a:ext cx="5189220" cy="603504"/>
           </a:xfrm>
           <a:prstGeom prst="rect">
             <a:avLst/>
@@ -4494,13 +5203,13 @@
           <a:p>
             <a:pPr marL="152400" indent="-152400">
               <a:spcAft>
-                <a:spcPts val="400"/>
+                <a:spcPts val="300"/>
               </a:spcAft>
               <a:buSzPct val="100000"/>
               <a:buChar char="•"/>
             </a:pPr>
             <a:r>
-              <a:rPr lang="en-US" sz="860" dirty="0">
+              <a:rPr lang="en-US" sz="840" dirty="0">
                 <a:solidFill>
                   <a:srgbClr val="2F4458"/>
                 </a:solidFill>
@@ -4508,20 +5217,20 @@
                 <a:ea typeface="Microsoft YaHei" pitchFamily="34" charset="-122"/>
                 <a:cs typeface="Microsoft YaHei" pitchFamily="34" charset="-120"/>
               </a:rPr>
-              <a:t>箱式机器人 A71-L-E1-H-CN ×150</a:t>
-            </a:r>
-            <a:endParaRPr lang="en-US" sz="860" dirty="0"/>
+              <a:t>箱式机器人 A71-L-E1-H-CN ×150（惯性 + 二维码导航）</a:t>
+            </a:r>
+            <a:endParaRPr lang="en-US" sz="840" dirty="0"/>
           </a:p>
           <a:p>
             <a:pPr marL="152400" indent="-152400">
               <a:spcAft>
-                <a:spcPts val="400"/>
+                <a:spcPts val="300"/>
               </a:spcAft>
               <a:buSzPct val="100000"/>
               <a:buChar char="•"/>
             </a:pPr>
             <a:r>
-              <a:rPr lang="en-US" sz="860" dirty="0">
+              <a:rPr lang="en-US" sz="840" dirty="0">
                 <a:solidFill>
                   <a:srgbClr val="2F4458"/>
                 </a:solidFill>
@@ -4529,20 +5238,20 @@
                 <a:ea typeface="Microsoft YaHei" pitchFamily="34" charset="-122"/>
                 <a:cs typeface="Microsoft YaHei" pitchFamily="34" charset="-120"/>
               </a:rPr>
-              <a:t>导航方式：惯性 + 二维码</a:t>
-            </a:r>
-            <a:endParaRPr lang="en-US" sz="860" dirty="0"/>
+              <a:t>HRC-3000-E4-CN 智能充电桩 ×25</a:t>
+            </a:r>
+            <a:endParaRPr lang="en-US" sz="840" dirty="0"/>
           </a:p>
           <a:p>
             <a:pPr marL="152400" indent="-152400">
               <a:spcAft>
-                <a:spcPts val="400"/>
+                <a:spcPts val="300"/>
               </a:spcAft>
               <a:buSzPct val="100000"/>
               <a:buChar char="•"/>
             </a:pPr>
             <a:r>
-              <a:rPr lang="en-US" sz="860" dirty="0">
+              <a:rPr lang="en-US" sz="840" dirty="0">
                 <a:solidFill>
                   <a:srgbClr val="2F4458"/>
                 </a:solidFill>
@@ -4550,20 +5259,42 @@
                 <a:ea typeface="Microsoft YaHei" pitchFamily="34" charset="-122"/>
                 <a:cs typeface="Microsoft YaHei" pitchFamily="34" charset="-120"/>
               </a:rPr>
-              <a:t>HRC-3000-E4-CN 智能充电桩 ×25</a:t>
-            </a:r>
-            <a:endParaRPr lang="en-US" sz="860" dirty="0"/>
-          </a:p>
+              <a:t>德玛输送线（Modbus 协议）· 安全门 / 安全围栏</a:t>
+            </a:r>
+            <a:endParaRPr lang="en-US" sz="840" dirty="0"/>
+          </a:p>
+        </p:txBody>
+      </p:sp>
+      <p:sp>
+        <p:nvSpPr>
+          <p:cNvPr id="127" name="Text 125"/>
+          <p:cNvSpPr/>
+          <p:nvPr/>
+        </p:nvSpPr>
+        <p:spPr>
+          <a:xfrm>
+            <a:off x="6396228" y="5669280"/>
+            <a:ext cx="5189220" cy="676656"/>
+          </a:xfrm>
+          <a:prstGeom prst="rect">
+            <a:avLst/>
+          </a:prstGeom>
+          <a:noFill/>
+          <a:ln/>
+        </p:spPr>
+        <p:txBody>
+          <a:bodyPr wrap="square" lIns="0" tIns="0" rIns="0" bIns="0" rtlCol="0" anchor="t"/>
+          <a:lstStyle/>
           <a:p>
             <a:pPr marL="152400" indent="-152400">
               <a:spcAft>
-                <a:spcPts val="400"/>
+                <a:spcPts val="200"/>
               </a:spcAft>
               <a:buSzPct val="100000"/>
               <a:buChar char="•"/>
             </a:pPr>
             <a:r>
-              <a:rPr lang="en-US" sz="860" dirty="0">
+              <a:rPr lang="en-US" sz="840" dirty="0">
                 <a:solidFill>
                   <a:srgbClr val="2F4458"/>
                 </a:solidFill>
@@ -4571,147 +5302,20 @@
                 <a:ea typeface="Microsoft YaHei" pitchFamily="34" charset="-122"/>
                 <a:cs typeface="Microsoft YaHei" pitchFamily="34" charset="-120"/>
               </a:rPr>
-              <a:t>德玛输送线（Modbus）· 安全门</a:t>
-            </a:r>
-            <a:endParaRPr lang="en-US" sz="860" dirty="0"/>
-          </a:p>
-        </p:txBody>
-      </p:sp>
-      <p:sp>
-        <p:nvSpPr>
-          <p:cNvPr id="104" name="Shape 102"/>
-          <p:cNvSpPr/>
-          <p:nvPr/>
-        </p:nvSpPr>
-        <p:spPr>
-          <a:xfrm>
-            <a:off x="8156448" y="4553712"/>
-            <a:ext cx="3575304" cy="1481328"/>
-          </a:xfrm>
-          <a:prstGeom prst="roundRect">
-            <a:avLst>
-              <a:gd name="adj" fmla="val 2469"/>
-            </a:avLst>
-          </a:prstGeom>
-          <a:solidFill>
-            <a:srgbClr val="FBFCFD"/>
-          </a:solidFill>
-          <a:ln w="7620">
-            <a:solidFill>
-              <a:srgbClr val="D7DDE4"/>
-            </a:solidFill>
-            <a:prstDash val="solid"/>
-          </a:ln>
-        </p:spPr>
-      </p:sp>
-      <p:sp>
-        <p:nvSpPr>
-          <p:cNvPr id="105" name="Text 103"/>
-          <p:cNvSpPr/>
-          <p:nvPr/>
-        </p:nvSpPr>
-        <p:spPr>
-          <a:xfrm>
-            <a:off x="8302752" y="4608576"/>
-            <a:ext cx="3300984" cy="201168"/>
-          </a:xfrm>
-          <a:prstGeom prst="rect">
-            <a:avLst/>
-          </a:prstGeom>
-          <a:noFill/>
-          <a:ln/>
-        </p:spPr>
-        <p:txBody>
-          <a:bodyPr wrap="square" lIns="0" tIns="0" rIns="0" bIns="0" rtlCol="0" anchor="ctr"/>
-          <a:lstStyle/>
-          <a:p>
-            <a:pPr algn="l" indent="0" marL="0">
-              <a:buNone/>
-            </a:pPr>
-            <a:r>
-              <a:rPr lang="en-US" sz="1100" b="1" dirty="0">
-                <a:solidFill>
-                  <a:srgbClr val="1F4E79"/>
-                </a:solidFill>
-                <a:latin typeface="Microsoft YaHei" pitchFamily="34" charset="0"/>
-                <a:ea typeface="Microsoft YaHei" pitchFamily="34" charset="-122"/>
-                <a:cs typeface="Microsoft YaHei" pitchFamily="34" charset="-120"/>
-              </a:rPr>
-              <a:t>工作站 · 出入库作业</a:t>
-            </a:r>
-            <a:endParaRPr lang="en-US" sz="1100" dirty="0"/>
-          </a:p>
-        </p:txBody>
-      </p:sp>
-      <p:sp>
-        <p:nvSpPr>
-          <p:cNvPr id="106" name="Text 104"/>
-          <p:cNvSpPr/>
-          <p:nvPr/>
-        </p:nvSpPr>
-        <p:spPr>
-          <a:xfrm>
-            <a:off x="8302752" y="4809744"/>
-            <a:ext cx="3300984" cy="128016"/>
-          </a:xfrm>
-          <a:prstGeom prst="rect">
-            <a:avLst/>
-          </a:prstGeom>
-          <a:noFill/>
-          <a:ln/>
-        </p:spPr>
-        <p:txBody>
-          <a:bodyPr wrap="square" lIns="0" tIns="0" rIns="0" bIns="0" rtlCol="0" anchor="ctr"/>
-          <a:lstStyle/>
-          <a:p>
-            <a:pPr algn="l" indent="0" marL="0">
-              <a:buNone/>
-            </a:pPr>
-            <a:r>
-              <a:rPr lang="en-US" sz="750" b="1" spc="100" kern="0" dirty="0">
-                <a:solidFill>
-                  <a:srgbClr val="8A929B"/>
-                </a:solidFill>
-                <a:latin typeface="Arial" pitchFamily="34" charset="0"/>
-                <a:ea typeface="Arial" pitchFamily="34" charset="-122"/>
-                <a:cs typeface="Arial" pitchFamily="34" charset="-120"/>
-              </a:rPr>
-              <a:t>WORKSTATIONS</a:t>
-            </a:r>
-            <a:endParaRPr lang="en-US" sz="750" dirty="0"/>
-          </a:p>
-        </p:txBody>
-      </p:sp>
-      <p:sp>
-        <p:nvSpPr>
-          <p:cNvPr id="107" name="Text 105"/>
-          <p:cNvSpPr/>
-          <p:nvPr/>
-        </p:nvSpPr>
-        <p:spPr>
-          <a:xfrm>
-            <a:off x="8321040" y="4992624"/>
-            <a:ext cx="3264408" cy="960120"/>
-          </a:xfrm>
-          <a:prstGeom prst="rect">
-            <a:avLst/>
-          </a:prstGeom>
-          <a:noFill/>
-          <a:ln/>
-        </p:spPr>
-        <p:txBody>
-          <a:bodyPr wrap="square" lIns="0" tIns="0" rIns="0" bIns="0" rtlCol="0" anchor="t"/>
-          <a:lstStyle/>
+              <a:t>入库工作站 In_01~06（+异常 In_11）</a:t>
+            </a:r>
+            <a:endParaRPr lang="en-US" sz="840" dirty="0"/>
+          </a:p>
           <a:p>
             <a:pPr marL="152400" indent="-152400">
               <a:spcAft>
-                <a:spcPts val="400"/>
+                <a:spcPts val="200"/>
               </a:spcAft>
               <a:buSzPct val="100000"/>
               <a:buChar char="•"/>
             </a:pPr>
             <a:r>
-              <a:rPr lang="en-US" sz="860" dirty="0">
+              <a:rPr lang="en-US" sz="840" dirty="0">
                 <a:solidFill>
                   <a:srgbClr val="2F4458"/>
                 </a:solidFill>
@@ -4719,20 +5323,20 @@
                 <a:ea typeface="Microsoft YaHei" pitchFamily="34" charset="-122"/>
                 <a:cs typeface="Microsoft YaHei" pitchFamily="34" charset="-120"/>
               </a:rPr>
-              <a:t>入库工作站 In_01~06（+异常 In_11）</a:t>
-            </a:r>
-            <a:endParaRPr lang="en-US" sz="860" dirty="0"/>
+              <a:t>入库取箱口 ×5（In_101/102/103/105/111）</a:t>
+            </a:r>
+            <a:endParaRPr lang="en-US" sz="840" dirty="0"/>
           </a:p>
           <a:p>
             <a:pPr marL="152400" indent="-152400">
               <a:spcAft>
-                <a:spcPts val="400"/>
+                <a:spcPts val="200"/>
               </a:spcAft>
               <a:buSzPct val="100000"/>
               <a:buChar char="•"/>
             </a:pPr>
             <a:r>
-              <a:rPr lang="en-US" sz="860" dirty="0">
+              <a:rPr lang="en-US" sz="840" dirty="0">
                 <a:solidFill>
                   <a:srgbClr val="2F4458"/>
                 </a:solidFill>
@@ -4740,20 +5344,20 @@
                 <a:ea typeface="Microsoft YaHei" pitchFamily="34" charset="-122"/>
                 <a:cs typeface="Microsoft YaHei" pitchFamily="34" charset="-120"/>
               </a:rPr>
-              <a:t>入库取箱口 ×5（In_101/102/103/105/111）</a:t>
-            </a:r>
-            <a:endParaRPr lang="en-US" sz="860" dirty="0"/>
+              <a:t>人机直拣工作站 out_01~22 · 异常打包口 101/102</a:t>
+            </a:r>
+            <a:endParaRPr lang="en-US" sz="840" dirty="0"/>
           </a:p>
           <a:p>
             <a:pPr marL="152400" indent="-152400">
               <a:spcAft>
-                <a:spcPts val="400"/>
+                <a:spcPts val="200"/>
               </a:spcAft>
               <a:buSzPct val="100000"/>
               <a:buChar char="•"/>
             </a:pPr>
             <a:r>
-              <a:rPr lang="en-US" sz="860" dirty="0">
+              <a:rPr lang="en-US" sz="840" dirty="0">
                 <a:solidFill>
                   <a:srgbClr val="2F4458"/>
                 </a:solidFill>
@@ -4761,43 +5365,22 @@
                 <a:ea typeface="Microsoft YaHei" pitchFamily="34" charset="-122"/>
                 <a:cs typeface="Microsoft YaHei" pitchFamily="34" charset="-120"/>
               </a:rPr>
-              <a:t>人机直拣工作站 out_01~22</a:t>
-            </a:r>
-            <a:endParaRPr lang="en-US" sz="860" dirty="0"/>
-          </a:p>
-          <a:p>
-            <a:pPr marL="152400" indent="-152400">
-              <a:spcAft>
-                <a:spcPts val="400"/>
-              </a:spcAft>
-              <a:buSzPct val="100000"/>
-              <a:buChar char="•"/>
-            </a:pPr>
-            <a:r>
-              <a:rPr lang="en-US" sz="860" dirty="0">
-                <a:solidFill>
-                  <a:srgbClr val="2F4458"/>
-                </a:solidFill>
-                <a:latin typeface="Microsoft YaHei" pitchFamily="34" charset="0"/>
-                <a:ea typeface="Microsoft YaHei" pitchFamily="34" charset="-122"/>
-                <a:cs typeface="Microsoft YaHei" pitchFamily="34" charset="-120"/>
-              </a:rPr>
-              <a:t>订单打包台 5 组×6 = 30 个 · 异常打包口 101/102</a:t>
-            </a:r>
-            <a:endParaRPr lang="en-US" sz="860" dirty="0"/>
-          </a:p>
-        </p:txBody>
-      </p:sp>
-      <p:sp>
-        <p:nvSpPr>
-          <p:cNvPr id="108" name="Text 106"/>
-          <p:cNvSpPr/>
-          <p:nvPr/>
-        </p:nvSpPr>
-        <p:spPr>
-          <a:xfrm>
-            <a:off x="310896" y="6236208"/>
-            <a:ext cx="11567160" cy="365760"/>
+              <a:t>订单打包台 5 组×6 = 30 个</a:t>
+            </a:r>
+            <a:endParaRPr lang="en-US" sz="840" dirty="0"/>
+          </a:p>
+        </p:txBody>
+      </p:sp>
+      <p:sp>
+        <p:nvSpPr>
+          <p:cNvPr id="128" name="Text 126"/>
+          <p:cNvSpPr/>
+          <p:nvPr/>
+        </p:nvSpPr>
+        <p:spPr>
+          <a:xfrm>
+            <a:off x="310896" y="6473952"/>
+            <a:ext cx="11567160" cy="274320"/>
           </a:xfrm>
           <a:prstGeom prst="rect">
             <a:avLst/>
@@ -4813,7 +5396,7 @@
               <a:buNone/>
             </a:pPr>
             <a:r>
-              <a:rPr lang="en-US" sz="800" dirty="0">
+              <a:rPr lang="en-US" sz="780" dirty="0">
                 <a:solidFill>
                   <a:srgbClr val="8A929B"/>
                 </a:solidFill>
@@ -4821,9 +5404,9 @@
                 <a:ea typeface="Microsoft YaHei" pitchFamily="34" charset="-122"/>
                 <a:cs typeface="Microsoft YaHei" pitchFamily="34" charset="-120"/>
               </a:rPr>
-              <a:t>说明：FC WMS 不直连自动化设备，统一经自研 WCS 以标准指令集下发、按『料箱到人』能力适配调度海柔闪攀系统；本页为全渠道仓库自动化总体框架在武汉 FC 仓的一次落地实例。</a:t>
-            </a:r>
-            <a:endParaRPr lang="en-US" sz="800" dirty="0"/>
+              <a:t>说明：FC WMS 不直连自动化设备；统一经自研 WCS 以标准指令集下发、按『料箱到人』能力适配调度海柔 HAIQ 系统（WES/ESS/DP），由 ESS 驱动箱式机器人与各工作站完成入库到出库全流程。</a:t>
+            </a:r>
+            <a:endParaRPr lang="en-US" sz="780" dirty="0"/>
           </a:p>
         </p:txBody>
       </p:sp>
